--- a/VoiceChessmate_Hackdevengers_2.0.pptx
+++ b/VoiceChessmate_Hackdevengers_2.0.pptx
@@ -17,8 +17,8 @@
   <p:notesMasterIdLst>
     <p:notesMasterId r:id="rId10"/>
   </p:notesMasterIdLst>
-  <p:sldSz cx="9144000" cy="5143500"/>
-  <p:notesSz cx="5143500" cy="9144000"/>
+  <p:sldSz cx="12191695" cy="6858000"/>
+  <p:notesSz cx="6858000" cy="12191695"/>
   <p:defaultTextStyle>
     <a:lvl1pPr marL="0" algn="l" defTabSz="914400" rtl="0" eaLnBrk="1" latinLnBrk="0" hangingPunct="1">
       <a:defRPr sz="1800" kern="1200">
@@ -1520,8 +1520,8 @@
         </p:blipFill>
         <p:spPr>
           <a:xfrm>
-            <a:off x="5577840" y="1371600"/>
-            <a:ext cx="1005840" cy="1005840"/>
+            <a:off x="5632704" y="1371600"/>
+            <a:ext cx="914400" cy="914400"/>
           </a:xfrm>
           <a:prstGeom prst="rect">
             <a:avLst/>
@@ -1536,8 +1536,8 @@
         </p:nvSpPr>
         <p:spPr>
           <a:xfrm>
-            <a:off x="731520" y="2560320"/>
-            <a:ext cx="10698480" cy="914400"/>
+            <a:off x="731520" y="2468880"/>
+            <a:ext cx="10698480" cy="822960"/>
           </a:xfrm>
           <a:prstGeom prst="rect">
             <a:avLst/>
@@ -1553,7 +1553,7 @@
               <a:buNone/>
             </a:pPr>
             <a:r>
-              <a:rPr lang="en-US" sz="4400" b="1" dirty="0">
+              <a:rPr lang="en-US" sz="4200" b="1" dirty="0">
                 <a:solidFill>
                   <a:srgbClr val="FFFFFF"/>
                 </a:solidFill>
@@ -1563,7 +1563,7 @@
               </a:rPr>
               <a:t>VoiceChessmate</a:t>
             </a:r>
-            <a:endParaRPr lang="en-US" sz="4400" dirty="0"/>
+            <a:endParaRPr lang="en-US" sz="4200" dirty="0"/>
           </a:p>
         </p:txBody>
       </p:sp>
@@ -1575,7 +1575,7 @@
         </p:nvSpPr>
         <p:spPr>
           <a:xfrm>
-            <a:off x="731520" y="3566160"/>
+            <a:off x="731520" y="3429000"/>
             <a:ext cx="10698480" cy="457200"/>
           </a:xfrm>
           <a:prstGeom prst="rect">
@@ -1592,7 +1592,7 @@
               <a:buNone/>
             </a:pPr>
             <a:r>
-              <a:rPr lang="en-US" sz="2000" dirty="0">
+              <a:rPr lang="en-US" sz="1900" dirty="0">
                 <a:solidFill>
                   <a:srgbClr val="3ECF8E"/>
                 </a:solidFill>
@@ -1602,7 +1602,7 @@
               </a:rPr>
               <a:t>Where Eyes Are Optional, But Victory Isn't.</a:t>
             </a:r>
-            <a:endParaRPr lang="en-US" sz="2000" dirty="0"/>
+            <a:endParaRPr lang="en-US" sz="1900" dirty="0"/>
           </a:p>
         </p:txBody>
       </p:sp>
@@ -1614,8 +1614,8 @@
         </p:nvSpPr>
         <p:spPr>
           <a:xfrm>
-            <a:off x="731520" y="4206240"/>
-            <a:ext cx="10698480" cy="457200"/>
+            <a:off x="731520" y="4069080"/>
+            <a:ext cx="10698480" cy="411480"/>
           </a:xfrm>
           <a:prstGeom prst="rect">
             <a:avLst/>
@@ -1631,7 +1631,7 @@
               <a:buNone/>
             </a:pPr>
             <a:r>
-              <a:rPr lang="en-US" sz="1400" dirty="0">
+              <a:rPr lang="en-US" sz="1350" dirty="0">
                 <a:solidFill>
                   <a:srgbClr val="8FAFA0"/>
                 </a:solidFill>
@@ -1641,7 +1641,7 @@
               </a:rPr>
               <a:t>An Autonomous, Conversational Voice Chess Companion for 285M Visually Impaired Players</a:t>
             </a:r>
-            <a:endParaRPr lang="en-US" sz="1400" dirty="0"/>
+            <a:endParaRPr lang="en-US" sz="1350" dirty="0"/>
           </a:p>
         </p:txBody>
       </p:sp>
@@ -1653,7 +1653,7 @@
         </p:nvSpPr>
         <p:spPr>
           <a:xfrm>
-            <a:off x="731520" y="5669280"/>
+            <a:off x="731520" y="5577840"/>
             <a:ext cx="10698480" cy="365760"/>
           </a:xfrm>
           <a:prstGeom prst="rect">
@@ -1724,7 +1724,7 @@
         </p:nvSpPr>
         <p:spPr>
           <a:xfrm>
-            <a:off x="731520" y="457200"/>
+            <a:off x="731520" y="411480"/>
             <a:ext cx="2011680" cy="292608"/>
           </a:xfrm>
           <a:prstGeom prst="roundRect">
@@ -1751,7 +1751,7 @@
         </p:nvSpPr>
         <p:spPr>
           <a:xfrm>
-            <a:off x="731520" y="457200"/>
+            <a:off x="731520" y="411480"/>
             <a:ext cx="2011680" cy="292608"/>
           </a:xfrm>
           <a:prstGeom prst="rect">
@@ -1790,24 +1790,24 @@
         </p:nvSpPr>
         <p:spPr>
           <a:xfrm>
-            <a:off x="731520" y="822960"/>
-            <a:ext cx="10515600" cy="640080"/>
-          </a:xfrm>
-          <a:prstGeom prst="rect">
-            <a:avLst/>
-          </a:prstGeom>
-          <a:noFill/>
-          <a:ln/>
-        </p:spPr>
-        <p:txBody>
-          <a:bodyPr wrap="square" rtlCol="0" anchor="ctr"/>
-          <a:lstStyle/>
-          <a:p>
-            <a:pPr indent="0" marL="0">
-              <a:buNone/>
-            </a:pPr>
-            <a:r>
-              <a:rPr lang="en-US" sz="2400" b="1" dirty="0">
+            <a:off x="731520" y="777240"/>
+            <a:ext cx="10698480" cy="594360"/>
+          </a:xfrm>
+          <a:prstGeom prst="rect">
+            <a:avLst/>
+          </a:prstGeom>
+          <a:noFill/>
+          <a:ln/>
+        </p:spPr>
+        <p:txBody>
+          <a:bodyPr wrap="square" rtlCol="0" anchor="ctr"/>
+          <a:lstStyle/>
+          <a:p>
+            <a:pPr indent="0" marL="0">
+              <a:buNone/>
+            </a:pPr>
+            <a:r>
+              <a:rPr lang="en-US" sz="2200" b="1" dirty="0">
                 <a:solidFill>
                   <a:srgbClr val="E8F4EE"/>
                 </a:solidFill>
@@ -1817,7 +1817,7 @@
               </a:rPr>
               <a:t>Why Digital Chess Fails Blind Players Worldwide</a:t>
             </a:r>
-            <a:endParaRPr lang="en-US" sz="2400" dirty="0"/>
+            <a:endParaRPr lang="en-US" sz="2200" dirty="0"/>
           </a:p>
         </p:txBody>
       </p:sp>
@@ -1829,12 +1829,12 @@
         </p:nvSpPr>
         <p:spPr>
           <a:xfrm>
-            <a:off x="731520" y="1737360"/>
-            <a:ext cx="3429000" cy="4389120"/>
+            <a:off x="731520" y="1600200"/>
+            <a:ext cx="3337560" cy="4389120"/>
           </a:xfrm>
           <a:prstGeom prst="roundRect">
             <a:avLst>
-              <a:gd name="adj" fmla="val 4000"/>
+              <a:gd name="adj" fmla="val 4110"/>
             </a:avLst>
           </a:prstGeom>
           <a:solidFill>
@@ -1870,8 +1870,8 @@
         </p:blipFill>
         <p:spPr>
           <a:xfrm>
-            <a:off x="1097280" y="2103120"/>
-            <a:ext cx="502920" cy="502920"/>
+            <a:off x="1051560" y="1920240"/>
+            <a:ext cx="457200" cy="457200"/>
           </a:xfrm>
           <a:prstGeom prst="rect">
             <a:avLst/>
@@ -1886,8 +1886,8 @@
         </p:nvSpPr>
         <p:spPr>
           <a:xfrm>
-            <a:off x="1097280" y="2834640"/>
-            <a:ext cx="2697480" cy="640080"/>
+            <a:off x="1051560" y="2560320"/>
+            <a:ext cx="2697480" cy="548640"/>
           </a:xfrm>
           <a:prstGeom prst="rect">
             <a:avLst/>
@@ -1911,7 +1911,7 @@
                 <a:ea typeface="Arial" pitchFamily="34" charset="-122"/>
                 <a:cs typeface="Arial" pitchFamily="34" charset="-120"/>
               </a:rPr>
-              <a:t>Extreme Visual Dependency</a:t>
+              <a:t>Visual Dependency</a:t>
             </a:r>
             <a:endParaRPr lang="en-US" sz="1600" dirty="0"/>
           </a:p>
@@ -1925,8 +1925,8 @@
         </p:nvSpPr>
         <p:spPr>
           <a:xfrm>
-            <a:off x="1097280" y="3657600"/>
-            <a:ext cx="2697480" cy="2103120"/>
+            <a:off x="1051560" y="3291840"/>
+            <a:ext cx="2697480" cy="2377440"/>
           </a:xfrm>
           <a:prstGeom prst="rect">
             <a:avLst/>
@@ -1945,7 +1945,7 @@
               <a:buNone/>
             </a:pPr>
             <a:r>
-              <a:rPr lang="en-US" sz="1300" dirty="0">
+              <a:rPr lang="en-US" sz="1250" dirty="0">
                 <a:solidFill>
                   <a:srgbClr val="9AB4A5"/>
                 </a:solidFill>
@@ -1955,7 +1955,7 @@
               </a:rPr>
               <a:t>Modern chess sites require continuous 2D spatial eye tracking. Blind players cannot compete in standard time controls (Rapid/Blitz) due to interface lag.</a:t>
             </a:r>
-            <a:endParaRPr lang="en-US" sz="1300" dirty="0"/>
+            <a:endParaRPr lang="en-US" sz="1250" dirty="0"/>
           </a:p>
         </p:txBody>
       </p:sp>
@@ -1967,12 +1967,12 @@
         </p:nvSpPr>
         <p:spPr>
           <a:xfrm>
-            <a:off x="4343400" y="1737360"/>
-            <a:ext cx="3429000" cy="4389120"/>
+            <a:off x="4416552" y="1600200"/>
+            <a:ext cx="3337560" cy="4389120"/>
           </a:xfrm>
           <a:prstGeom prst="roundRect">
             <a:avLst>
-              <a:gd name="adj" fmla="val 4000"/>
+              <a:gd name="adj" fmla="val 4110"/>
             </a:avLst>
           </a:prstGeom>
           <a:solidFill>
@@ -2008,8 +2008,8 @@
         </p:blipFill>
         <p:spPr>
           <a:xfrm>
-            <a:off x="4709160" y="2103120"/>
-            <a:ext cx="502920" cy="502920"/>
+            <a:off x="4736592" y="1920240"/>
+            <a:ext cx="457200" cy="457200"/>
           </a:xfrm>
           <a:prstGeom prst="rect">
             <a:avLst/>
@@ -2024,8 +2024,8 @@
         </p:nvSpPr>
         <p:spPr>
           <a:xfrm>
-            <a:off x="4709160" y="2834640"/>
-            <a:ext cx="2697480" cy="640080"/>
+            <a:off x="4736592" y="2560320"/>
+            <a:ext cx="2697480" cy="548640"/>
           </a:xfrm>
           <a:prstGeom prst="rect">
             <a:avLst/>
@@ -2049,7 +2049,7 @@
                 <a:ea typeface="Arial" pitchFamily="34" charset="-122"/>
                 <a:cs typeface="Arial" pitchFamily="34" charset="-120"/>
               </a:rPr>
-              <a:t>Crippling Screen Reader Latency</a:t>
+              <a:t>Screen Reader Latency</a:t>
             </a:r>
             <a:endParaRPr lang="en-US" sz="1600" dirty="0"/>
           </a:p>
@@ -2063,8 +2063,8 @@
         </p:nvSpPr>
         <p:spPr>
           <a:xfrm>
-            <a:off x="4709160" y="3657600"/>
-            <a:ext cx="2697480" cy="2103120"/>
+            <a:off x="4736592" y="3291840"/>
+            <a:ext cx="2697480" cy="2377440"/>
           </a:xfrm>
           <a:prstGeom prst="rect">
             <a:avLst/>
@@ -2083,7 +2083,7 @@
               <a:buNone/>
             </a:pPr>
             <a:r>
-              <a:rPr lang="en-US" sz="1300" dirty="0">
+              <a:rPr lang="en-US" sz="1250" dirty="0">
                 <a:solidFill>
                   <a:srgbClr val="9AB4A5"/>
                 </a:solidFill>
@@ -2093,7 +2093,7 @@
               </a:rPr>
               <a:t>Standard screen readers traverse chessboard tables square by square. A 6-10 second move latency guarantees immediate clock flag-falls in timed play.</a:t>
             </a:r>
-            <a:endParaRPr lang="en-US" sz="1300" dirty="0"/>
+            <a:endParaRPr lang="en-US" sz="1250" dirty="0"/>
           </a:p>
         </p:txBody>
       </p:sp>
@@ -2105,12 +2105,12 @@
         </p:nvSpPr>
         <p:spPr>
           <a:xfrm>
-            <a:off x="7955280" y="1737360"/>
-            <a:ext cx="3429000" cy="4389120"/>
+            <a:off x="8101584" y="1600200"/>
+            <a:ext cx="3337560" cy="4389120"/>
           </a:xfrm>
           <a:prstGeom prst="roundRect">
             <a:avLst>
-              <a:gd name="adj" fmla="val 4000"/>
+              <a:gd name="adj" fmla="val 4110"/>
             </a:avLst>
           </a:prstGeom>
           <a:solidFill>
@@ -2146,8 +2146,8 @@
         </p:blipFill>
         <p:spPr>
           <a:xfrm>
-            <a:off x="8321040" y="2103120"/>
-            <a:ext cx="502920" cy="502920"/>
+            <a:off x="8421624" y="1920240"/>
+            <a:ext cx="457200" cy="457200"/>
           </a:xfrm>
           <a:prstGeom prst="rect">
             <a:avLst/>
@@ -2162,8 +2162,8 @@
         </p:nvSpPr>
         <p:spPr>
           <a:xfrm>
-            <a:off x="8321040" y="2834640"/>
-            <a:ext cx="2697480" cy="640080"/>
+            <a:off x="8421624" y="2560320"/>
+            <a:ext cx="2697480" cy="548640"/>
           </a:xfrm>
           <a:prstGeom prst="rect">
             <a:avLst/>
@@ -2201,8 +2201,8 @@
         </p:nvSpPr>
         <p:spPr>
           <a:xfrm>
-            <a:off x="8321040" y="3657600"/>
-            <a:ext cx="2697480" cy="2103120"/>
+            <a:off x="8421624" y="3291840"/>
+            <a:ext cx="2697480" cy="2377440"/>
           </a:xfrm>
           <a:prstGeom prst="rect">
             <a:avLst/>
@@ -2221,7 +2221,7 @@
               <a:buNone/>
             </a:pPr>
             <a:r>
-              <a:rPr lang="en-US" sz="1300" dirty="0">
+              <a:rPr lang="en-US" sz="1250" dirty="0">
                 <a:solidFill>
                   <a:srgbClr val="9AB4A5"/>
                 </a:solidFill>
@@ -2231,7 +2231,7 @@
               </a:rPr>
               <a:t>Web Speech API in Chromium suffers silent GC truncation mid-sentence and IPC race conditions when moves are played in quick succession.</a:t>
             </a:r>
-            <a:endParaRPr lang="en-US" sz="1300" dirty="0"/>
+            <a:endParaRPr lang="en-US" sz="1250" dirty="0"/>
           </a:p>
         </p:txBody>
       </p:sp>
@@ -2275,7 +2275,7 @@
         </p:nvSpPr>
         <p:spPr>
           <a:xfrm>
-            <a:off x="731520" y="457200"/>
+            <a:off x="731520" y="411480"/>
             <a:ext cx="2011680" cy="292608"/>
           </a:xfrm>
           <a:prstGeom prst="roundRect">
@@ -2302,7 +2302,7 @@
         </p:nvSpPr>
         <p:spPr>
           <a:xfrm>
-            <a:off x="731520" y="457200"/>
+            <a:off x="731520" y="411480"/>
             <a:ext cx="2011680" cy="292608"/>
           </a:xfrm>
           <a:prstGeom prst="rect">
@@ -2341,24 +2341,24 @@
         </p:nvSpPr>
         <p:spPr>
           <a:xfrm>
-            <a:off x="731520" y="822960"/>
-            <a:ext cx="10515600" cy="640080"/>
-          </a:xfrm>
-          <a:prstGeom prst="rect">
-            <a:avLst/>
-          </a:prstGeom>
-          <a:noFill/>
-          <a:ln/>
-        </p:spPr>
-        <p:txBody>
-          <a:bodyPr wrap="square" rtlCol="0" anchor="ctr"/>
-          <a:lstStyle/>
-          <a:p>
-            <a:pPr indent="0" marL="0">
-              <a:buNone/>
-            </a:pPr>
-            <a:r>
-              <a:rPr lang="en-US" sz="2400" b="1" dirty="0">
+            <a:off x="731520" y="777240"/>
+            <a:ext cx="10698480" cy="594360"/>
+          </a:xfrm>
+          <a:prstGeom prst="rect">
+            <a:avLst/>
+          </a:prstGeom>
+          <a:noFill/>
+          <a:ln/>
+        </p:spPr>
+        <p:txBody>
+          <a:bodyPr wrap="square" rtlCol="0" anchor="ctr"/>
+          <a:lstStyle/>
+          <a:p>
+            <a:pPr indent="0" marL="0">
+              <a:buNone/>
+            </a:pPr>
+            <a:r>
+              <a:rPr lang="en-US" sz="2200" b="1" dirty="0">
                 <a:solidFill>
                   <a:srgbClr val="E8F4EE"/>
                 </a:solidFill>
@@ -2368,7 +2368,7 @@
               </a:rPr>
               <a:t>Hands-Free, Eyes-Free Conversational Gameplay</a:t>
             </a:r>
-            <a:endParaRPr lang="en-US" sz="2400" dirty="0"/>
+            <a:endParaRPr lang="en-US" sz="2200" dirty="0"/>
           </a:p>
         </p:txBody>
       </p:sp>
@@ -2380,8 +2380,8 @@
         </p:nvSpPr>
         <p:spPr>
           <a:xfrm>
-            <a:off x="731520" y="1737360"/>
-            <a:ext cx="5212080" cy="4389120"/>
+            <a:off x="731520" y="1600200"/>
+            <a:ext cx="5166360" cy="4389120"/>
           </a:xfrm>
           <a:prstGeom prst="roundRect">
             <a:avLst>
@@ -2421,7 +2421,7 @@
         </p:blipFill>
         <p:spPr>
           <a:xfrm>
-            <a:off x="1097280" y="2103120"/>
+            <a:off x="1051560" y="1920240"/>
             <a:ext cx="457200" cy="457200"/>
           </a:xfrm>
           <a:prstGeom prst="rect">
@@ -2437,24 +2437,24 @@
         </p:nvSpPr>
         <p:spPr>
           <a:xfrm>
-            <a:off x="1645920" y="2148840"/>
-            <a:ext cx="3840480" cy="365760"/>
-          </a:xfrm>
-          <a:prstGeom prst="rect">
-            <a:avLst/>
-          </a:prstGeom>
-          <a:noFill/>
-          <a:ln/>
-        </p:spPr>
-        <p:txBody>
-          <a:bodyPr wrap="square" rtlCol="0" anchor="ctr"/>
-          <a:lstStyle/>
-          <a:p>
-            <a:pPr indent="0" marL="0">
-              <a:buNone/>
-            </a:pPr>
-            <a:r>
-              <a:rPr lang="en-US" sz="1800" b="1" dirty="0">
+            <a:off x="1645920" y="1965960"/>
+            <a:ext cx="4069080" cy="365760"/>
+          </a:xfrm>
+          <a:prstGeom prst="rect">
+            <a:avLst/>
+          </a:prstGeom>
+          <a:noFill/>
+          <a:ln/>
+        </p:spPr>
+        <p:txBody>
+          <a:bodyPr wrap="square" rtlCol="0" anchor="ctr"/>
+          <a:lstStyle/>
+          <a:p>
+            <a:pPr indent="0" marL="0">
+              <a:buNone/>
+            </a:pPr>
+            <a:r>
+              <a:rPr lang="en-US" sz="1700" b="1" dirty="0">
                 <a:solidFill>
                   <a:srgbClr val="FFFFFF"/>
                 </a:solidFill>
@@ -2464,7 +2464,7 @@
               </a:rPr>
               <a:t>Natural Dialogue Flow</a:t>
             </a:r>
-            <a:endParaRPr lang="en-US" sz="1800" dirty="0"/>
+            <a:endParaRPr lang="en-US" sz="1700" dirty="0"/>
           </a:p>
         </p:txBody>
       </p:sp>
@@ -2476,8 +2476,8 @@
         </p:nvSpPr>
         <p:spPr>
           <a:xfrm>
-            <a:off x="1097280" y="2743200"/>
-            <a:ext cx="4480560" cy="3108960"/>
+            <a:off x="1051560" y="2560320"/>
+            <a:ext cx="4526280" cy="3108960"/>
           </a:xfrm>
           <a:prstGeom prst="rect">
             <a:avLst/>
@@ -2491,12 +2491,12 @@
           <a:p>
             <a:pPr indent="0" marL="0">
               <a:lnSpc>
-                <a:spcPts val="1800"/>
+                <a:spcPts val="1700"/>
               </a:lnSpc>
               <a:buNone/>
             </a:pPr>
             <a:r>
-              <a:rPr lang="en-US" sz="1300" dirty="0">
+              <a:rPr lang="en-US" sz="1250" dirty="0">
                 <a:solidFill>
                   <a:srgbClr val="9AB4A5"/>
                 </a:solidFill>
@@ -2506,17 +2506,17 @@
               </a:rPr>
               <a:t>PLAYER:  'Knight to Felix 3'</a:t>
             </a:r>
-            <a:endParaRPr lang="en-US" sz="1300" dirty="0"/>
+            <a:endParaRPr lang="en-US" sz="1250" dirty="0"/>
           </a:p>
           <a:p>
             <a:pPr indent="0" marL="0">
               <a:lnSpc>
-                <a:spcPts val="1800"/>
+                <a:spcPts val="1700"/>
               </a:lnSpc>
               <a:buNone/>
             </a:pPr>
             <a:r>
-              <a:rPr lang="en-US" sz="1300" dirty="0">
+              <a:rPr lang="en-US" sz="1250" dirty="0">
                 <a:solidFill>
                   <a:srgbClr val="9AB4A5"/>
                 </a:solidFill>
@@ -2526,17 +2526,17 @@
               </a:rPr>
               <a:t>COACH:   'Knight to Felix 3. Solid development.</a:t>
             </a:r>
-            <a:endParaRPr lang="en-US" sz="1300" dirty="0"/>
+            <a:endParaRPr lang="en-US" sz="1250" dirty="0"/>
           </a:p>
           <a:p>
             <a:pPr indent="0" marL="0">
               <a:lnSpc>
-                <a:spcPts val="1800"/>
+                <a:spcPts val="1700"/>
               </a:lnSpc>
               <a:buNone/>
             </a:pPr>
             <a:r>
-              <a:rPr lang="en-US" sz="1300" dirty="0">
+              <a:rPr lang="en-US" sz="1250" dirty="0">
                 <a:solidFill>
                   <a:srgbClr val="9AB4A5"/>
                 </a:solidFill>
@@ -2546,17 +2546,17 @@
               </a:rPr>
               <a:t>          I will counter with pawn to Cesar 5.</a:t>
             </a:r>
-            <a:endParaRPr lang="en-US" sz="1300" dirty="0"/>
+            <a:endParaRPr lang="en-US" sz="1250" dirty="0"/>
           </a:p>
           <a:p>
             <a:pPr indent="0" marL="0">
               <a:lnSpc>
-                <a:spcPts val="1800"/>
+                <a:spcPts val="1700"/>
               </a:lnSpc>
               <a:buNone/>
             </a:pPr>
             <a:r>
-              <a:rPr lang="en-US" sz="1300" dirty="0">
+              <a:rPr lang="en-US" sz="1250" dirty="0">
                 <a:solidFill>
                   <a:srgbClr val="9AB4A5"/>
                 </a:solidFill>
@@ -2566,26 +2566,26 @@
               </a:rPr>
               <a:t>          Your move, White.'</a:t>
             </a:r>
-            <a:endParaRPr lang="en-US" sz="1300" dirty="0"/>
+            <a:endParaRPr lang="en-US" sz="1250" dirty="0"/>
           </a:p>
           <a:p>
             <a:pPr indent="0" marL="0">
               <a:lnSpc>
-                <a:spcPts val="1800"/>
+                <a:spcPts val="1700"/>
               </a:lnSpc>
               <a:buNone/>
             </a:pPr>
-            <a:endParaRPr lang="en-US" sz="1300" dirty="0"/>
+            <a:endParaRPr lang="en-US" sz="1250" dirty="0"/>
           </a:p>
           <a:p>
             <a:pPr indent="0" marL="0">
               <a:lnSpc>
-                <a:spcPts val="1800"/>
+                <a:spcPts val="1700"/>
               </a:lnSpc>
               <a:buNone/>
             </a:pPr>
             <a:r>
-              <a:rPr lang="en-US" sz="1300" dirty="0">
+              <a:rPr lang="en-US" sz="1250" dirty="0">
                 <a:solidFill>
                   <a:srgbClr val="9AB4A5"/>
                 </a:solidFill>
@@ -2595,17 +2595,17 @@
               </a:rPr>
               <a:t>• Push-to-Talk (J key): Instant mic activation with zero queue delay.</a:t>
             </a:r>
-            <a:endParaRPr lang="en-US" sz="1300" dirty="0"/>
+            <a:endParaRPr lang="en-US" sz="1250" dirty="0"/>
           </a:p>
           <a:p>
             <a:pPr indent="0" marL="0">
               <a:lnSpc>
-                <a:spcPts val="1800"/>
+                <a:spcPts val="1700"/>
               </a:lnSpc>
               <a:buNone/>
             </a:pPr>
             <a:r>
-              <a:rPr lang="en-US" sz="1300" dirty="0">
+              <a:rPr lang="en-US" sz="1250" dirty="0">
                 <a:solidFill>
                   <a:srgbClr val="9AB4A5"/>
                 </a:solidFill>
@@ -2615,17 +2615,17 @@
               </a:rPr>
               <a:t>• Single-Touch Auditory Hotkeys: Instant board audit (D), threats (T), and tactics (G).</a:t>
             </a:r>
-            <a:endParaRPr lang="en-US" sz="1300" dirty="0"/>
+            <a:endParaRPr lang="en-US" sz="1250" dirty="0"/>
           </a:p>
           <a:p>
             <a:pPr indent="0" marL="0">
               <a:lnSpc>
-                <a:spcPts val="1800"/>
+                <a:spcPts val="1700"/>
               </a:lnSpc>
               <a:buNone/>
             </a:pPr>
             <a:r>
-              <a:rPr lang="en-US" sz="1300" dirty="0">
+              <a:rPr lang="en-US" sz="1250" dirty="0">
                 <a:solidFill>
                   <a:srgbClr val="9AB4A5"/>
                 </a:solidFill>
@@ -2635,7 +2635,7 @@
               </a:rPr>
               <a:t>• FIDE/IBCA Phonetics: Eliminates ambiguous rhymes (B/C/D/E/G).</a:t>
             </a:r>
-            <a:endParaRPr lang="en-US" sz="1300" dirty="0"/>
+            <a:endParaRPr lang="en-US" sz="1250" dirty="0"/>
           </a:p>
         </p:txBody>
       </p:sp>
@@ -2647,12 +2647,12 @@
         </p:nvSpPr>
         <p:spPr>
           <a:xfrm>
-            <a:off x="6217920" y="1737360"/>
-            <a:ext cx="5212080" cy="1325880"/>
+            <a:off x="6263640" y="1600200"/>
+            <a:ext cx="5166360" cy="1371600"/>
           </a:xfrm>
           <a:prstGeom prst="roundRect">
             <a:avLst>
-              <a:gd name="adj" fmla="val 10345"/>
+              <a:gd name="adj" fmla="val 10000"/>
             </a:avLst>
           </a:prstGeom>
           <a:solidFill>
@@ -2688,7 +2688,7 @@
         </p:blipFill>
         <p:spPr>
           <a:xfrm>
-            <a:off x="6492240" y="2057400"/>
+            <a:off x="6537960" y="1920240"/>
             <a:ext cx="411480" cy="411480"/>
           </a:xfrm>
           <a:prstGeom prst="rect">
@@ -2704,8 +2704,8 @@
         </p:nvSpPr>
         <p:spPr>
           <a:xfrm>
-            <a:off x="7040880" y="1965960"/>
-            <a:ext cx="4114800" cy="320040"/>
+            <a:off x="7086600" y="1828800"/>
+            <a:ext cx="4160520" cy="320040"/>
           </a:xfrm>
           <a:prstGeom prst="rect">
             <a:avLst/>
@@ -2743,24 +2743,27 @@
         </p:nvSpPr>
         <p:spPr>
           <a:xfrm>
-            <a:off x="7040880" y="2331720"/>
-            <a:ext cx="4114800" cy="594360"/>
-          </a:xfrm>
-          <a:prstGeom prst="rect">
-            <a:avLst/>
-          </a:prstGeom>
-          <a:noFill/>
-          <a:ln/>
-        </p:spPr>
-        <p:txBody>
-          <a:bodyPr wrap="square" rtlCol="0" anchor="ctr"/>
-          <a:lstStyle/>
-          <a:p>
-            <a:pPr indent="0" marL="0">
-              <a:buNone/>
-            </a:pPr>
-            <a:r>
-              <a:rPr lang="en-US" sz="1200" dirty="0">
+            <a:off x="7086600" y="2194560"/>
+            <a:ext cx="4160520" cy="640080"/>
+          </a:xfrm>
+          <a:prstGeom prst="rect">
+            <a:avLst/>
+          </a:prstGeom>
+          <a:noFill/>
+          <a:ln/>
+        </p:spPr>
+        <p:txBody>
+          <a:bodyPr wrap="square" rtlCol="0" anchor="ctr"/>
+          <a:lstStyle/>
+          <a:p>
+            <a:pPr indent="0" marL="0">
+              <a:lnSpc>
+                <a:spcPts val="1500"/>
+              </a:lnSpc>
+              <a:buNone/>
+            </a:pPr>
+            <a:r>
+              <a:rPr lang="en-US" sz="1150" dirty="0">
                 <a:solidFill>
                   <a:srgbClr val="9AB4A5"/>
                 </a:solidFill>
@@ -2770,7 +2773,7 @@
               </a:rPr>
               <a:t>Realistic wooden impact synthesis for moves, captures, checks, and game-over fanfares.</a:t>
             </a:r>
-            <a:endParaRPr lang="en-US" sz="1200" dirty="0"/>
+            <a:endParaRPr lang="en-US" sz="1150" dirty="0"/>
           </a:p>
         </p:txBody>
       </p:sp>
@@ -2782,12 +2785,12 @@
         </p:nvSpPr>
         <p:spPr>
           <a:xfrm>
-            <a:off x="6217920" y="3246120"/>
-            <a:ext cx="5212080" cy="1325880"/>
+            <a:off x="6263640" y="3108960"/>
+            <a:ext cx="5166360" cy="1371600"/>
           </a:xfrm>
           <a:prstGeom prst="roundRect">
             <a:avLst>
-              <a:gd name="adj" fmla="val 10345"/>
+              <a:gd name="adj" fmla="val 10000"/>
             </a:avLst>
           </a:prstGeom>
           <a:solidFill>
@@ -2823,7 +2826,7 @@
         </p:blipFill>
         <p:spPr>
           <a:xfrm>
-            <a:off x="6492240" y="3566160"/>
+            <a:off x="6537960" y="3429000"/>
             <a:ext cx="411480" cy="411480"/>
           </a:xfrm>
           <a:prstGeom prst="rect">
@@ -2839,8 +2842,8 @@
         </p:nvSpPr>
         <p:spPr>
           <a:xfrm>
-            <a:off x="7040880" y="3474720"/>
-            <a:ext cx="4114800" cy="320040"/>
+            <a:off x="7086600" y="3337560"/>
+            <a:ext cx="4160520" cy="320040"/>
           </a:xfrm>
           <a:prstGeom prst="rect">
             <a:avLst/>
@@ -2878,24 +2881,27 @@
         </p:nvSpPr>
         <p:spPr>
           <a:xfrm>
-            <a:off x="7040880" y="3840480"/>
-            <a:ext cx="4114800" cy="594360"/>
-          </a:xfrm>
-          <a:prstGeom prst="rect">
-            <a:avLst/>
-          </a:prstGeom>
-          <a:noFill/>
-          <a:ln/>
-        </p:spPr>
-        <p:txBody>
-          <a:bodyPr wrap="square" rtlCol="0" anchor="ctr"/>
-          <a:lstStyle/>
-          <a:p>
-            <a:pPr indent="0" marL="0">
-              <a:buNone/>
-            </a:pPr>
-            <a:r>
-              <a:rPr lang="en-US" sz="1200" dirty="0">
+            <a:off x="7086600" y="3703320"/>
+            <a:ext cx="4160520" cy="640080"/>
+          </a:xfrm>
+          <a:prstGeom prst="rect">
+            <a:avLst/>
+          </a:prstGeom>
+          <a:noFill/>
+          <a:ln/>
+        </p:spPr>
+        <p:txBody>
+          <a:bodyPr wrap="square" rtlCol="0" anchor="ctr"/>
+          <a:lstStyle/>
+          <a:p>
+            <a:pPr indent="0" marL="0">
+              <a:lnSpc>
+                <a:spcPts val="1500"/>
+              </a:lnSpc>
+              <a:buNone/>
+            </a:pPr>
+            <a:r>
+              <a:rPr lang="en-US" sz="1150" dirty="0">
                 <a:solidFill>
                   <a:srgbClr val="9AB4A5"/>
                 </a:solidFill>
@@ -2905,7 +2911,7 @@
               </a:rPr>
               <a:t>Full Bullet, Blitz, and Rapid modes with audio countdown alerts and flag-fall detection.</a:t>
             </a:r>
-            <a:endParaRPr lang="en-US" sz="1200" dirty="0"/>
+            <a:endParaRPr lang="en-US" sz="1150" dirty="0"/>
           </a:p>
         </p:txBody>
       </p:sp>
@@ -2917,12 +2923,12 @@
         </p:nvSpPr>
         <p:spPr>
           <a:xfrm>
-            <a:off x="6217920" y="4754880"/>
-            <a:ext cx="5212080" cy="1325880"/>
+            <a:off x="6263640" y="4617720"/>
+            <a:ext cx="5166360" cy="1371600"/>
           </a:xfrm>
           <a:prstGeom prst="roundRect">
             <a:avLst>
-              <a:gd name="adj" fmla="val 10345"/>
+              <a:gd name="adj" fmla="val 10000"/>
             </a:avLst>
           </a:prstGeom>
           <a:solidFill>
@@ -2958,7 +2964,7 @@
         </p:blipFill>
         <p:spPr>
           <a:xfrm>
-            <a:off x="6492240" y="5074920"/>
+            <a:off x="6537960" y="4937760"/>
             <a:ext cx="411480" cy="411480"/>
           </a:xfrm>
           <a:prstGeom prst="rect">
@@ -2974,8 +2980,8 @@
         </p:nvSpPr>
         <p:spPr>
           <a:xfrm>
-            <a:off x="7040880" y="4983480"/>
-            <a:ext cx="4114800" cy="320040"/>
+            <a:off x="7086600" y="4846320"/>
+            <a:ext cx="4160520" cy="320040"/>
           </a:xfrm>
           <a:prstGeom prst="rect">
             <a:avLst/>
@@ -3013,24 +3019,27 @@
         </p:nvSpPr>
         <p:spPr>
           <a:xfrm>
-            <a:off x="7040880" y="5349240"/>
-            <a:ext cx="4114800" cy="594360"/>
-          </a:xfrm>
-          <a:prstGeom prst="rect">
-            <a:avLst/>
-          </a:prstGeom>
-          <a:noFill/>
-          <a:ln/>
-        </p:spPr>
-        <p:txBody>
-          <a:bodyPr wrap="square" rtlCol="0" anchor="ctr"/>
-          <a:lstStyle/>
-          <a:p>
-            <a:pPr indent="0" marL="0">
-              <a:buNone/>
-            </a:pPr>
-            <a:r>
-              <a:rPr lang="en-US" sz="1200" dirty="0">
+            <a:off x="7086600" y="5212080"/>
+            <a:ext cx="4160520" cy="640080"/>
+          </a:xfrm>
+          <a:prstGeom prst="rect">
+            <a:avLst/>
+          </a:prstGeom>
+          <a:noFill/>
+          <a:ln/>
+        </p:spPr>
+        <p:txBody>
+          <a:bodyPr wrap="square" rtlCol="0" anchor="ctr"/>
+          <a:lstStyle/>
+          <a:p>
+            <a:pPr indent="0" marL="0">
+              <a:lnSpc>
+                <a:spcPts val="1500"/>
+              </a:lnSpc>
+              <a:buNone/>
+            </a:pPr>
+            <a:r>
+              <a:rPr lang="en-US" sz="1150" dirty="0">
                 <a:solidFill>
                   <a:srgbClr val="9AB4A5"/>
                 </a:solidFill>
@@ -3040,7 +3049,7 @@
               </a:rPr>
               <a:t>High-contrast board themes, text font scaling, screen reader caption logs, and full shortcuts.</a:t>
             </a:r>
-            <a:endParaRPr lang="en-US" sz="1200" dirty="0"/>
+            <a:endParaRPr lang="en-US" sz="1150" dirty="0"/>
           </a:p>
         </p:txBody>
       </p:sp>
@@ -3084,7 +3093,7 @@
         </p:nvSpPr>
         <p:spPr>
           <a:xfrm>
-            <a:off x="731520" y="457200"/>
+            <a:off x="731520" y="411480"/>
             <a:ext cx="2011680" cy="292608"/>
           </a:xfrm>
           <a:prstGeom prst="roundRect">
@@ -3111,7 +3120,7 @@
         </p:nvSpPr>
         <p:spPr>
           <a:xfrm>
-            <a:off x="731520" y="457200"/>
+            <a:off x="731520" y="411480"/>
             <a:ext cx="2011680" cy="292608"/>
           </a:xfrm>
           <a:prstGeom prst="rect">
@@ -3150,24 +3159,24 @@
         </p:nvSpPr>
         <p:spPr>
           <a:xfrm>
-            <a:off x="731520" y="822960"/>
-            <a:ext cx="10515600" cy="640080"/>
-          </a:xfrm>
-          <a:prstGeom prst="rect">
-            <a:avLst/>
-          </a:prstGeom>
-          <a:noFill/>
-          <a:ln/>
-        </p:spPr>
-        <p:txBody>
-          <a:bodyPr wrap="square" rtlCol="0" anchor="ctr"/>
-          <a:lstStyle/>
-          <a:p>
-            <a:pPr indent="0" marL="0">
-              <a:buNone/>
-            </a:pPr>
-            <a:r>
-              <a:rPr lang="en-US" sz="2400" b="1" dirty="0">
+            <a:off x="731520" y="777240"/>
+            <a:ext cx="10698480" cy="594360"/>
+          </a:xfrm>
+          <a:prstGeom prst="rect">
+            <a:avLst/>
+          </a:prstGeom>
+          <a:noFill/>
+          <a:ln/>
+        </p:spPr>
+        <p:txBody>
+          <a:bodyPr wrap="square" rtlCol="0" anchor="ctr"/>
+          <a:lstStyle/>
+          <a:p>
+            <a:pPr indent="0" marL="0">
+              <a:buNone/>
+            </a:pPr>
+            <a:r>
+              <a:rPr lang="en-US" sz="2200" b="1" dirty="0">
                 <a:solidFill>
                   <a:srgbClr val="E8F4EE"/>
                 </a:solidFill>
@@ -3177,7 +3186,7 @@
               </a:rPr>
               <a:t>High-Fidelity AssemblyAI Voice Agent Pipeline</a:t>
             </a:r>
-            <a:endParaRPr lang="en-US" sz="2400" dirty="0"/>
+            <a:endParaRPr lang="en-US" sz="2200" dirty="0"/>
           </a:p>
         </p:txBody>
       </p:sp>
@@ -3189,12 +3198,12 @@
         </p:nvSpPr>
         <p:spPr>
           <a:xfrm>
-            <a:off x="731520" y="1737360"/>
-            <a:ext cx="2560320" cy="4389120"/>
+            <a:off x="731520" y="1600200"/>
+            <a:ext cx="2514600" cy="4389120"/>
           </a:xfrm>
           <a:prstGeom prst="roundRect">
             <a:avLst>
-              <a:gd name="adj" fmla="val 5357"/>
+              <a:gd name="adj" fmla="val 5455"/>
             </a:avLst>
           </a:prstGeom>
           <a:solidFill>
@@ -3216,8 +3225,8 @@
         </p:nvSpPr>
         <p:spPr>
           <a:xfrm>
-            <a:off x="1005840" y="2103120"/>
-            <a:ext cx="2011680" cy="274320"/>
+            <a:off x="960120" y="1920240"/>
+            <a:ext cx="2057400" cy="274320"/>
           </a:xfrm>
           <a:prstGeom prst="rect">
             <a:avLst/>
@@ -3255,24 +3264,24 @@
         </p:nvSpPr>
         <p:spPr>
           <a:xfrm>
-            <a:off x="1005840" y="2468880"/>
-            <a:ext cx="2011680" cy="640080"/>
-          </a:xfrm>
-          <a:prstGeom prst="rect">
-            <a:avLst/>
-          </a:prstGeom>
-          <a:noFill/>
-          <a:ln/>
-        </p:spPr>
-        <p:txBody>
-          <a:bodyPr wrap="square" rtlCol="0" anchor="ctr"/>
-          <a:lstStyle/>
-          <a:p>
-            <a:pPr indent="0" marL="0">
-              <a:buNone/>
-            </a:pPr>
-            <a:r>
-              <a:rPr lang="en-US" sz="1500" b="1" dirty="0">
+            <a:off x="960120" y="2331720"/>
+            <a:ext cx="2057400" cy="548640"/>
+          </a:xfrm>
+          <a:prstGeom prst="rect">
+            <a:avLst/>
+          </a:prstGeom>
+          <a:noFill/>
+          <a:ln/>
+        </p:spPr>
+        <p:txBody>
+          <a:bodyPr wrap="square" rtlCol="0" anchor="ctr"/>
+          <a:lstStyle/>
+          <a:p>
+            <a:pPr indent="0" marL="0">
+              <a:buNone/>
+            </a:pPr>
+            <a:r>
+              <a:rPr lang="en-US" sz="1450" b="1" dirty="0">
                 <a:solidFill>
                   <a:srgbClr val="FFFFFF"/>
                 </a:solidFill>
@@ -3282,7 +3291,7 @@
               </a:rPr>
               <a:t>24kHz Audio Capture</a:t>
             </a:r>
-            <a:endParaRPr lang="en-US" sz="1500" dirty="0"/>
+            <a:endParaRPr lang="en-US" sz="1450" dirty="0"/>
           </a:p>
         </p:txBody>
       </p:sp>
@@ -3294,8 +3303,8 @@
         </p:nvSpPr>
         <p:spPr>
           <a:xfrm>
-            <a:off x="1005840" y="3291840"/>
-            <a:ext cx="2011680" cy="2560320"/>
+            <a:off x="960120" y="3063240"/>
+            <a:ext cx="2057400" cy="2651760"/>
           </a:xfrm>
           <a:prstGeom prst="rect">
             <a:avLst/>
@@ -3309,12 +3318,12 @@
           <a:p>
             <a:pPr indent="0" marL="0">
               <a:lnSpc>
-                <a:spcPts val="1700"/>
+                <a:spcPts val="1600"/>
               </a:lnSpc>
               <a:buNone/>
             </a:pPr>
             <a:r>
-              <a:rPr lang="en-US" sz="1200" dirty="0">
+              <a:rPr lang="en-US" sz="1150" dirty="0">
                 <a:solidFill>
                   <a:srgbClr val="9AB4A5"/>
                 </a:solidFill>
@@ -3324,7 +3333,7 @@
               </a:rPr>
               <a:t>AudioWorklet processor chunks microphone stream into 25ms PCM16 buffers, optimized for speech recognition.</a:t>
             </a:r>
-            <a:endParaRPr lang="en-US" sz="1200" dirty="0"/>
+            <a:endParaRPr lang="en-US" sz="1150" dirty="0"/>
           </a:p>
         </p:txBody>
       </p:sp>
@@ -3336,12 +3345,12 @@
         </p:nvSpPr>
         <p:spPr>
           <a:xfrm>
-            <a:off x="3429000" y="1737360"/>
-            <a:ext cx="2560320" cy="4389120"/>
+            <a:off x="3465576" y="1600200"/>
+            <a:ext cx="2514600" cy="4389120"/>
           </a:xfrm>
           <a:prstGeom prst="roundRect">
             <a:avLst>
-              <a:gd name="adj" fmla="val 5357"/>
+              <a:gd name="adj" fmla="val 5455"/>
             </a:avLst>
           </a:prstGeom>
           <a:solidFill>
@@ -3363,8 +3372,8 @@
         </p:nvSpPr>
         <p:spPr>
           <a:xfrm>
-            <a:off x="3703320" y="2103120"/>
-            <a:ext cx="2011680" cy="274320"/>
+            <a:off x="3694176" y="1920240"/>
+            <a:ext cx="2057400" cy="274320"/>
           </a:xfrm>
           <a:prstGeom prst="rect">
             <a:avLst/>
@@ -3402,24 +3411,24 @@
         </p:nvSpPr>
         <p:spPr>
           <a:xfrm>
-            <a:off x="3703320" y="2468880"/>
-            <a:ext cx="2011680" cy="640080"/>
-          </a:xfrm>
-          <a:prstGeom prst="rect">
-            <a:avLst/>
-          </a:prstGeom>
-          <a:noFill/>
-          <a:ln/>
-        </p:spPr>
-        <p:txBody>
-          <a:bodyPr wrap="square" rtlCol="0" anchor="ctr"/>
-          <a:lstStyle/>
-          <a:p>
-            <a:pPr indent="0" marL="0">
-              <a:buNone/>
-            </a:pPr>
-            <a:r>
-              <a:rPr lang="en-US" sz="1500" b="1" dirty="0">
+            <a:off x="3694176" y="2331720"/>
+            <a:ext cx="2057400" cy="548640"/>
+          </a:xfrm>
+          <a:prstGeom prst="rect">
+            <a:avLst/>
+          </a:prstGeom>
+          <a:noFill/>
+          <a:ln/>
+        </p:spPr>
+        <p:txBody>
+          <a:bodyPr wrap="square" rtlCol="0" anchor="ctr"/>
+          <a:lstStyle/>
+          <a:p>
+            <a:pPr indent="0" marL="0">
+              <a:buNone/>
+            </a:pPr>
+            <a:r>
+              <a:rPr lang="en-US" sz="1450" b="1" dirty="0">
                 <a:solidFill>
                   <a:srgbClr val="FFFFFF"/>
                 </a:solidFill>
@@ -3429,7 +3438,7 @@
               </a:rPr>
               <a:t>WebSocket Streaming</a:t>
             </a:r>
-            <a:endParaRPr lang="en-US" sz="1500" dirty="0"/>
+            <a:endParaRPr lang="en-US" sz="1450" dirty="0"/>
           </a:p>
         </p:txBody>
       </p:sp>
@@ -3441,8 +3450,8 @@
         </p:nvSpPr>
         <p:spPr>
           <a:xfrm>
-            <a:off x="3703320" y="3291840"/>
-            <a:ext cx="2011680" cy="2560320"/>
+            <a:off x="3694176" y="3063240"/>
+            <a:ext cx="2057400" cy="2651760"/>
           </a:xfrm>
           <a:prstGeom prst="rect">
             <a:avLst/>
@@ -3456,12 +3465,12 @@
           <a:p>
             <a:pPr indent="0" marL="0">
               <a:lnSpc>
-                <a:spcPts val="1700"/>
+                <a:spcPts val="1600"/>
               </a:lnSpc>
               <a:buNone/>
             </a:pPr>
             <a:r>
-              <a:rPr lang="en-US" sz="1200" dirty="0">
+              <a:rPr lang="en-US" sz="1150" dirty="0">
                 <a:solidFill>
                   <a:srgbClr val="9AB4A5"/>
                 </a:solidFill>
@@ -3471,7 +3480,7 @@
               </a:rPr>
               <a:t>Real-time bidirectional communication with AssemblyAI agent. Sub-300ms turn-taking with built-in voice activity detection.</a:t>
             </a:r>
-            <a:endParaRPr lang="en-US" sz="1200" dirty="0"/>
+            <a:endParaRPr lang="en-US" sz="1150" dirty="0"/>
           </a:p>
         </p:txBody>
       </p:sp>
@@ -3483,12 +3492,12 @@
         </p:nvSpPr>
         <p:spPr>
           <a:xfrm>
-            <a:off x="6126480" y="1737360"/>
-            <a:ext cx="2560320" cy="4389120"/>
+            <a:off x="6199632" y="1600200"/>
+            <a:ext cx="2514600" cy="4389120"/>
           </a:xfrm>
           <a:prstGeom prst="roundRect">
             <a:avLst>
-              <a:gd name="adj" fmla="val 5357"/>
+              <a:gd name="adj" fmla="val 5455"/>
             </a:avLst>
           </a:prstGeom>
           <a:solidFill>
@@ -3510,8 +3519,8 @@
         </p:nvSpPr>
         <p:spPr>
           <a:xfrm>
-            <a:off x="6400800" y="2103120"/>
-            <a:ext cx="2011680" cy="274320"/>
+            <a:off x="6428232" y="1920240"/>
+            <a:ext cx="2057400" cy="274320"/>
           </a:xfrm>
           <a:prstGeom prst="rect">
             <a:avLst/>
@@ -3549,24 +3558,24 @@
         </p:nvSpPr>
         <p:spPr>
           <a:xfrm>
-            <a:off x="6400800" y="2468880"/>
-            <a:ext cx="2011680" cy="640080"/>
-          </a:xfrm>
-          <a:prstGeom prst="rect">
-            <a:avLst/>
-          </a:prstGeom>
-          <a:noFill/>
-          <a:ln/>
-        </p:spPr>
-        <p:txBody>
-          <a:bodyPr wrap="square" rtlCol="0" anchor="ctr"/>
-          <a:lstStyle/>
-          <a:p>
-            <a:pPr indent="0" marL="0">
-              <a:buNone/>
-            </a:pPr>
-            <a:r>
-              <a:rPr lang="en-US" sz="1500" b="1" dirty="0">
+            <a:off x="6428232" y="2331720"/>
+            <a:ext cx="2057400" cy="548640"/>
+          </a:xfrm>
+          <a:prstGeom prst="rect">
+            <a:avLst/>
+          </a:prstGeom>
+          <a:noFill/>
+          <a:ln/>
+        </p:spPr>
+        <p:txBody>
+          <a:bodyPr wrap="square" rtlCol="0" anchor="ctr"/>
+          <a:lstStyle/>
+          <a:p>
+            <a:pPr indent="0" marL="0">
+              <a:buNone/>
+            </a:pPr>
+            <a:r>
+              <a:rPr lang="en-US" sz="1450" b="1" dirty="0">
                 <a:solidFill>
                   <a:srgbClr val="FFFFFF"/>
                 </a:solidFill>
@@ -3576,7 +3585,7 @@
               </a:rPr>
               <a:t>Typed Tool Calling</a:t>
             </a:r>
-            <a:endParaRPr lang="en-US" sz="1500" dirty="0"/>
+            <a:endParaRPr lang="en-US" sz="1450" dirty="0"/>
           </a:p>
         </p:txBody>
       </p:sp>
@@ -3588,8 +3597,8 @@
         </p:nvSpPr>
         <p:spPr>
           <a:xfrm>
-            <a:off x="6400800" y="3291840"/>
-            <a:ext cx="2011680" cy="2560320"/>
+            <a:off x="6428232" y="3063240"/>
+            <a:ext cx="2057400" cy="2651760"/>
           </a:xfrm>
           <a:prstGeom prst="rect">
             <a:avLst/>
@@ -3603,12 +3612,12 @@
           <a:p>
             <a:pPr indent="0" marL="0">
               <a:lnSpc>
-                <a:spcPts val="1700"/>
+                <a:spcPts val="1600"/>
               </a:lnSpc>
               <a:buNone/>
             </a:pPr>
             <a:r>
-              <a:rPr lang="en-US" sz="1200" dirty="0">
+              <a:rPr lang="en-US" sz="1150" dirty="0">
                 <a:solidFill>
                   <a:srgbClr val="9AB4A5"/>
                 </a:solidFill>
@@ -3618,7 +3627,7 @@
               </a:rPr>
               <a:t>AssemblyAI triggers deterministic JSON schema tools (apply_move, describe_board) executed against the chess engine.</a:t>
             </a:r>
-            <a:endParaRPr lang="en-US" sz="1200" dirty="0"/>
+            <a:endParaRPr lang="en-US" sz="1150" dirty="0"/>
           </a:p>
         </p:txBody>
       </p:sp>
@@ -3630,12 +3639,12 @@
         </p:nvSpPr>
         <p:spPr>
           <a:xfrm>
-            <a:off x="8823960" y="1737360"/>
-            <a:ext cx="2560320" cy="4389120"/>
+            <a:off x="8933688" y="1600200"/>
+            <a:ext cx="2514600" cy="4389120"/>
           </a:xfrm>
           <a:prstGeom prst="roundRect">
             <a:avLst>
-              <a:gd name="adj" fmla="val 5357"/>
+              <a:gd name="adj" fmla="val 5455"/>
             </a:avLst>
           </a:prstGeom>
           <a:solidFill>
@@ -3657,8 +3666,8 @@
         </p:nvSpPr>
         <p:spPr>
           <a:xfrm>
-            <a:off x="9098280" y="2103120"/>
-            <a:ext cx="2011680" cy="274320"/>
+            <a:off x="9162288" y="1920240"/>
+            <a:ext cx="2057400" cy="274320"/>
           </a:xfrm>
           <a:prstGeom prst="rect">
             <a:avLst/>
@@ -3696,24 +3705,24 @@
         </p:nvSpPr>
         <p:spPr>
           <a:xfrm>
-            <a:off x="9098280" y="2468880"/>
-            <a:ext cx="2011680" cy="640080"/>
-          </a:xfrm>
-          <a:prstGeom prst="rect">
-            <a:avLst/>
-          </a:prstGeom>
-          <a:noFill/>
-          <a:ln/>
-        </p:spPr>
-        <p:txBody>
-          <a:bodyPr wrap="square" rtlCol="0" anchor="ctr"/>
-          <a:lstStyle/>
-          <a:p>
-            <a:pPr indent="0" marL="0">
-              <a:buNone/>
-            </a:pPr>
-            <a:r>
-              <a:rPr lang="en-US" sz="1500" b="1" dirty="0">
+            <a:off x="9162288" y="2331720"/>
+            <a:ext cx="2057400" cy="548640"/>
+          </a:xfrm>
+          <a:prstGeom prst="rect">
+            <a:avLst/>
+          </a:prstGeom>
+          <a:noFill/>
+          <a:ln/>
+        </p:spPr>
+        <p:txBody>
+          <a:bodyPr wrap="square" rtlCol="0" anchor="ctr"/>
+          <a:lstStyle/>
+          <a:p>
+            <a:pPr indent="0" marL="0">
+              <a:buNone/>
+            </a:pPr>
+            <a:r>
+              <a:rPr lang="en-US" sz="1450" b="1" dirty="0">
                 <a:solidFill>
                   <a:srgbClr val="FFFFFF"/>
                 </a:solidFill>
@@ -3721,9 +3730,9 @@
                 <a:ea typeface="Arial" pitchFamily="34" charset="-122"/>
                 <a:cs typeface="Arial" pitchFamily="34" charset="-120"/>
               </a:rPr>
-              <a:t>Dual AudioContext Output</a:t>
-            </a:r>
-            <a:endParaRPr lang="en-US" sz="1500" dirty="0"/>
+              <a:t>Dual AudioContext</a:t>
+            </a:r>
+            <a:endParaRPr lang="en-US" sz="1450" dirty="0"/>
           </a:p>
         </p:txBody>
       </p:sp>
@@ -3735,8 +3744,8 @@
         </p:nvSpPr>
         <p:spPr>
           <a:xfrm>
-            <a:off x="9098280" y="3291840"/>
-            <a:ext cx="2011680" cy="2560320"/>
+            <a:off x="9162288" y="3063240"/>
+            <a:ext cx="2057400" cy="2651760"/>
           </a:xfrm>
           <a:prstGeom prst="rect">
             <a:avLst/>
@@ -3750,12 +3759,12 @@
           <a:p>
             <a:pPr indent="0" marL="0">
               <a:lnSpc>
-                <a:spcPts val="1700"/>
+                <a:spcPts val="1600"/>
               </a:lnSpc>
               <a:buNone/>
             </a:pPr>
             <a:r>
-              <a:rPr lang="en-US" sz="1200" dirty="0">
+              <a:rPr lang="en-US" sz="1150" dirty="0">
                 <a:solidFill>
                   <a:srgbClr val="9AB4A5"/>
                 </a:solidFill>
@@ -3765,7 +3774,7 @@
               </a:rPr>
               <a:t>Native 48kHz AudioBufferSourceNode playback fixes Linux/PulseAudio muting and ensures zero audio drops.</a:t>
             </a:r>
-            <a:endParaRPr lang="en-US" sz="1200" dirty="0"/>
+            <a:endParaRPr lang="en-US" sz="1150" dirty="0"/>
           </a:p>
         </p:txBody>
       </p:sp>
@@ -3809,7 +3818,7 @@
         </p:nvSpPr>
         <p:spPr>
           <a:xfrm>
-            <a:off x="731520" y="457200"/>
+            <a:off x="731520" y="411480"/>
             <a:ext cx="2011680" cy="292608"/>
           </a:xfrm>
           <a:prstGeom prst="roundRect">
@@ -3836,7 +3845,7 @@
         </p:nvSpPr>
         <p:spPr>
           <a:xfrm>
-            <a:off x="731520" y="457200"/>
+            <a:off x="731520" y="411480"/>
             <a:ext cx="2011680" cy="292608"/>
           </a:xfrm>
           <a:prstGeom prst="rect">
@@ -3875,24 +3884,24 @@
         </p:nvSpPr>
         <p:spPr>
           <a:xfrm>
-            <a:off x="731520" y="822960"/>
-            <a:ext cx="10515600" cy="640080"/>
-          </a:xfrm>
-          <a:prstGeom prst="rect">
-            <a:avLst/>
-          </a:prstGeom>
-          <a:noFill/>
-          <a:ln/>
-        </p:spPr>
-        <p:txBody>
-          <a:bodyPr wrap="square" rtlCol="0" anchor="ctr"/>
-          <a:lstStyle/>
-          <a:p>
-            <a:pPr indent="0" marL="0">
-              <a:buNone/>
-            </a:pPr>
-            <a:r>
-              <a:rPr lang="en-US" sz="2400" b="1" dirty="0">
+            <a:off x="731520" y="777240"/>
+            <a:ext cx="10698480" cy="594360"/>
+          </a:xfrm>
+          <a:prstGeom prst="rect">
+            <a:avLst/>
+          </a:prstGeom>
+          <a:noFill/>
+          <a:ln/>
+        </p:spPr>
+        <p:txBody>
+          <a:bodyPr wrap="square" rtlCol="0" anchor="ctr"/>
+          <a:lstStyle/>
+          <a:p>
+            <a:pPr indent="0" marL="0">
+              <a:buNone/>
+            </a:pPr>
+            <a:r>
+              <a:rPr lang="en-US" sz="2200" b="1" dirty="0">
                 <a:solidFill>
                   <a:srgbClr val="E8F4EE"/>
                 </a:solidFill>
@@ -3902,7 +3911,7 @@
               </a:rPr>
               <a:t>FIDE / IBCA Rule 2.1 &amp; Spatial Audio Navigation</a:t>
             </a:r>
-            <a:endParaRPr lang="en-US" sz="2400" dirty="0"/>
+            <a:endParaRPr lang="en-US" sz="2200" dirty="0"/>
           </a:p>
         </p:txBody>
       </p:sp>
@@ -3914,8 +3923,8 @@
         </p:nvSpPr>
         <p:spPr>
           <a:xfrm>
-            <a:off x="731520" y="1737360"/>
-            <a:ext cx="5212080" cy="4389120"/>
+            <a:off x="731520" y="1600200"/>
+            <a:ext cx="5166360" cy="4389120"/>
           </a:xfrm>
           <a:prstGeom prst="roundRect">
             <a:avLst>
@@ -3941,8 +3950,8 @@
         </p:nvSpPr>
         <p:spPr>
           <a:xfrm>
-            <a:off x="1097280" y="2011680"/>
-            <a:ext cx="4572000" cy="365760"/>
+            <a:off x="1051560" y="1920240"/>
+            <a:ext cx="4526280" cy="365760"/>
           </a:xfrm>
           <a:prstGeom prst="rect">
             <a:avLst/>
@@ -3980,8 +3989,8 @@
         </p:nvSpPr>
         <p:spPr>
           <a:xfrm>
-            <a:off x="1097280" y="2560320"/>
-            <a:ext cx="4572000" cy="3291840"/>
+            <a:off x="1051560" y="2468880"/>
+            <a:ext cx="4526280" cy="3200400"/>
           </a:xfrm>
           <a:prstGeom prst="rect">
             <a:avLst/>
@@ -3995,12 +4004,12 @@
           <a:p>
             <a:pPr indent="0" marL="0">
               <a:lnSpc>
-                <a:spcPts val="1800"/>
+                <a:spcPts val="1700"/>
               </a:lnSpc>
               <a:buNone/>
             </a:pPr>
             <a:r>
-              <a:rPr lang="en-US" sz="1200" dirty="0">
+              <a:rPr lang="en-US" sz="1150" dirty="0">
                 <a:solidFill>
                   <a:srgbClr val="3ECF8E"/>
                 </a:solidFill>
@@ -4010,17 +4019,17 @@
               </a:rPr>
               <a:t>File A  →  Anna     ('Pawn Anna 2 to Anna 4')</a:t>
             </a:r>
-            <a:endParaRPr lang="en-US" sz="1200" dirty="0"/>
+            <a:endParaRPr lang="en-US" sz="1150" dirty="0"/>
           </a:p>
           <a:p>
             <a:pPr indent="0" marL="0">
               <a:lnSpc>
-                <a:spcPts val="1800"/>
+                <a:spcPts val="1700"/>
               </a:lnSpc>
               <a:buNone/>
             </a:pPr>
             <a:r>
-              <a:rPr lang="en-US" sz="1200" dirty="0">
+              <a:rPr lang="en-US" sz="1150" dirty="0">
                 <a:solidFill>
                   <a:srgbClr val="3ECF8E"/>
                 </a:solidFill>
@@ -4030,17 +4039,17 @@
               </a:rPr>
               <a:t>File B  →  Bella    ('Knight Bella 1 to Cesar 3')</a:t>
             </a:r>
-            <a:endParaRPr lang="en-US" sz="1200" dirty="0"/>
+            <a:endParaRPr lang="en-US" sz="1150" dirty="0"/>
           </a:p>
           <a:p>
             <a:pPr indent="0" marL="0">
               <a:lnSpc>
-                <a:spcPts val="1800"/>
+                <a:spcPts val="1700"/>
               </a:lnSpc>
               <a:buNone/>
             </a:pPr>
             <a:r>
-              <a:rPr lang="en-US" sz="1200" dirty="0">
+              <a:rPr lang="en-US" sz="1150" dirty="0">
                 <a:solidFill>
                   <a:srgbClr val="3ECF8E"/>
                 </a:solidFill>
@@ -4050,17 +4059,17 @@
               </a:rPr>
               <a:t>File C  →  Cesar    ('Pawn Cesar 7 to Cesar 5')</a:t>
             </a:r>
-            <a:endParaRPr lang="en-US" sz="1200" dirty="0"/>
+            <a:endParaRPr lang="en-US" sz="1150" dirty="0"/>
           </a:p>
           <a:p>
             <a:pPr indent="0" marL="0">
               <a:lnSpc>
-                <a:spcPts val="1800"/>
+                <a:spcPts val="1700"/>
               </a:lnSpc>
               <a:buNone/>
             </a:pPr>
             <a:r>
-              <a:rPr lang="en-US" sz="1200" dirty="0">
+              <a:rPr lang="en-US" sz="1150" dirty="0">
                 <a:solidFill>
                   <a:srgbClr val="3ECF8E"/>
                 </a:solidFill>
@@ -4070,17 +4079,17 @@
               </a:rPr>
               <a:t>File D  →  David    ('Queen David 1 to David 4')</a:t>
             </a:r>
-            <a:endParaRPr lang="en-US" sz="1200" dirty="0"/>
+            <a:endParaRPr lang="en-US" sz="1150" dirty="0"/>
           </a:p>
           <a:p>
             <a:pPr indent="0" marL="0">
               <a:lnSpc>
-                <a:spcPts val="1800"/>
+                <a:spcPts val="1700"/>
               </a:lnSpc>
               <a:buNone/>
             </a:pPr>
             <a:r>
-              <a:rPr lang="en-US" sz="1200" dirty="0">
+              <a:rPr lang="en-US" sz="1150" dirty="0">
                 <a:solidFill>
                   <a:srgbClr val="3ECF8E"/>
                 </a:solidFill>
@@ -4090,17 +4099,17 @@
               </a:rPr>
               <a:t>File E  →  Eva      ('Pawn Eva 7 to Eva 5')</a:t>
             </a:r>
-            <a:endParaRPr lang="en-US" sz="1200" dirty="0"/>
+            <a:endParaRPr lang="en-US" sz="1150" dirty="0"/>
           </a:p>
           <a:p>
             <a:pPr indent="0" marL="0">
               <a:lnSpc>
-                <a:spcPts val="1800"/>
+                <a:spcPts val="1700"/>
               </a:lnSpc>
               <a:buNone/>
             </a:pPr>
             <a:r>
-              <a:rPr lang="en-US" sz="1200" dirty="0">
+              <a:rPr lang="en-US" sz="1150" dirty="0">
                 <a:solidFill>
                   <a:srgbClr val="3ECF8E"/>
                 </a:solidFill>
@@ -4110,17 +4119,17 @@
               </a:rPr>
               <a:t>File F  →  Felix    ('Bishop Felix 1 to Cesar 4')</a:t>
             </a:r>
-            <a:endParaRPr lang="en-US" sz="1200" dirty="0"/>
+            <a:endParaRPr lang="en-US" sz="1150" dirty="0"/>
           </a:p>
           <a:p>
             <a:pPr indent="0" marL="0">
               <a:lnSpc>
-                <a:spcPts val="1800"/>
+                <a:spcPts val="1700"/>
               </a:lnSpc>
               <a:buNone/>
             </a:pPr>
             <a:r>
-              <a:rPr lang="en-US" sz="1200" dirty="0">
+              <a:rPr lang="en-US" sz="1150" dirty="0">
                 <a:solidFill>
                   <a:srgbClr val="3ECF8E"/>
                 </a:solidFill>
@@ -4130,17 +4139,17 @@
               </a:rPr>
               <a:t>File G  →  Gustav   ('Knight Gustav 1 to Felix 3')</a:t>
             </a:r>
-            <a:endParaRPr lang="en-US" sz="1200" dirty="0"/>
+            <a:endParaRPr lang="en-US" sz="1150" dirty="0"/>
           </a:p>
           <a:p>
             <a:pPr indent="0" marL="0">
               <a:lnSpc>
-                <a:spcPts val="1800"/>
+                <a:spcPts val="1700"/>
               </a:lnSpc>
               <a:buNone/>
             </a:pPr>
             <a:r>
-              <a:rPr lang="en-US" sz="1200" dirty="0">
+              <a:rPr lang="en-US" sz="1150" dirty="0">
                 <a:solidFill>
                   <a:srgbClr val="3ECF8E"/>
                 </a:solidFill>
@@ -4150,7 +4159,7 @@
               </a:rPr>
               <a:t>File H  →  Hector   ('Rook Hector 1 to Hector 3')</a:t>
             </a:r>
-            <a:endParaRPr lang="en-US" sz="1200" dirty="0"/>
+            <a:endParaRPr lang="en-US" sz="1150" dirty="0"/>
           </a:p>
         </p:txBody>
       </p:sp>
@@ -4162,8 +4171,8 @@
         </p:nvSpPr>
         <p:spPr>
           <a:xfrm>
-            <a:off x="6217920" y="1737360"/>
-            <a:ext cx="5212080" cy="4389120"/>
+            <a:off x="6263640" y="1600200"/>
+            <a:ext cx="5166360" cy="4389120"/>
           </a:xfrm>
           <a:prstGeom prst="roundRect">
             <a:avLst>
@@ -4203,8 +4212,8 @@
         </p:blipFill>
         <p:spPr>
           <a:xfrm>
-            <a:off x="6583680" y="2103120"/>
-            <a:ext cx="457200" cy="457200"/>
+            <a:off x="6583680" y="1920240"/>
+            <a:ext cx="411480" cy="411480"/>
           </a:xfrm>
           <a:prstGeom prst="rect">
             <a:avLst/>
@@ -4219,8 +4228,8 @@
         </p:nvSpPr>
         <p:spPr>
           <a:xfrm>
-            <a:off x="7132320" y="2148840"/>
-            <a:ext cx="3931920" cy="365760"/>
+            <a:off x="7132320" y="1965960"/>
+            <a:ext cx="4160520" cy="365760"/>
           </a:xfrm>
           <a:prstGeom prst="rect">
             <a:avLst/>
@@ -4258,8 +4267,8 @@
         </p:nvSpPr>
         <p:spPr>
           <a:xfrm>
-            <a:off x="6583680" y="2743200"/>
-            <a:ext cx="4480560" cy="3108960"/>
+            <a:off x="6583680" y="2560320"/>
+            <a:ext cx="4526280" cy="3108960"/>
           </a:xfrm>
           <a:prstGeom prst="rect">
             <a:avLst/>
@@ -4273,12 +4282,12 @@
           <a:p>
             <a:pPr indent="0" marL="0">
               <a:lnSpc>
-                <a:spcPts val="1800"/>
+                <a:spcPts val="1700"/>
               </a:lnSpc>
               <a:buNone/>
             </a:pPr>
             <a:r>
-              <a:rPr lang="en-US" sz="1200" dirty="0">
+              <a:rPr lang="en-US" sz="1150" dirty="0">
                 <a:solidFill>
                   <a:srgbClr val="9AB4A5"/>
                 </a:solidFill>
@@ -4288,26 +4297,26 @@
               </a:rPr>
               <a:t>• Stereo Panning across Files: Moves on the A-file pan hard left; moves on the H-file pan hard right.</a:t>
             </a:r>
-            <a:endParaRPr lang="en-US" sz="1200" dirty="0"/>
+            <a:endParaRPr lang="en-US" sz="1150" dirty="0"/>
           </a:p>
           <a:p>
             <a:pPr indent="0" marL="0">
               <a:lnSpc>
-                <a:spcPts val="1800"/>
+                <a:spcPts val="1700"/>
               </a:lnSpc>
               <a:buNone/>
             </a:pPr>
-            <a:endParaRPr lang="en-US" sz="1200" dirty="0"/>
+            <a:endParaRPr lang="en-US" sz="1150" dirty="0"/>
           </a:p>
           <a:p>
             <a:pPr indent="0" marL="0">
               <a:lnSpc>
-                <a:spcPts val="1800"/>
+                <a:spcPts val="1700"/>
               </a:lnSpc>
               <a:buNone/>
             </a:pPr>
             <a:r>
-              <a:rPr lang="en-US" sz="1200" dirty="0">
+              <a:rPr lang="en-US" sz="1150" dirty="0">
                 <a:solidFill>
                   <a:srgbClr val="9AB4A5"/>
                 </a:solidFill>
@@ -4317,26 +4326,26 @@
               </a:rPr>
               <a:t>• Pentatonic Pitch across Ranks: Low pitches correspond to rank 1; high pitches correspond to rank 8.</a:t>
             </a:r>
-            <a:endParaRPr lang="en-US" sz="1200" dirty="0"/>
+            <a:endParaRPr lang="en-US" sz="1150" dirty="0"/>
           </a:p>
           <a:p>
             <a:pPr indent="0" marL="0">
               <a:lnSpc>
-                <a:spcPts val="1800"/>
+                <a:spcPts val="1700"/>
               </a:lnSpc>
               <a:buNone/>
             </a:pPr>
-            <a:endParaRPr lang="en-US" sz="1200" dirty="0"/>
+            <a:endParaRPr lang="en-US" sz="1150" dirty="0"/>
           </a:p>
           <a:p>
             <a:pPr indent="0" marL="0">
               <a:lnSpc>
-                <a:spcPts val="1800"/>
+                <a:spcPts val="1700"/>
               </a:lnSpc>
               <a:buNone/>
             </a:pPr>
             <a:r>
-              <a:rPr lang="en-US" sz="1200" dirty="0">
+              <a:rPr lang="en-US" sz="1150" dirty="0">
                 <a:solidFill>
                   <a:srgbClr val="9AB4A5"/>
                 </a:solidFill>
@@ -4346,26 +4355,26 @@
               </a:rPr>
               <a:t>• Acoustic Piece Timbres: Pawns (sine), Knights (triangle), Rooks/Queens (sawtooth).</a:t>
             </a:r>
-            <a:endParaRPr lang="en-US" sz="1200" dirty="0"/>
+            <a:endParaRPr lang="en-US" sz="1150" dirty="0"/>
           </a:p>
           <a:p>
             <a:pPr indent="0" marL="0">
               <a:lnSpc>
-                <a:spcPts val="1800"/>
+                <a:spcPts val="1700"/>
               </a:lnSpc>
               <a:buNone/>
             </a:pPr>
-            <a:endParaRPr lang="en-US" sz="1200" dirty="0"/>
+            <a:endParaRPr lang="en-US" sz="1150" dirty="0"/>
           </a:p>
           <a:p>
             <a:pPr indent="0" marL="0">
               <a:lnSpc>
-                <a:spcPts val="1800"/>
+                <a:spcPts val="1700"/>
               </a:lnSpc>
               <a:buNone/>
             </a:pPr>
             <a:r>
-              <a:rPr lang="en-US" sz="1200" dirty="0">
+              <a:rPr lang="en-US" sz="1150" dirty="0">
                 <a:solidFill>
                   <a:srgbClr val="9AB4A5"/>
                 </a:solidFill>
@@ -4375,7 +4384,7 @@
               </a:rPr>
               <a:t>Result: Sighted players visually parse a move in 200ms; VoiceChessmate's spatial audio delivers the move in ~260ms — 10x faster than speech.</a:t>
             </a:r>
-            <a:endParaRPr lang="en-US" sz="1200" dirty="0"/>
+            <a:endParaRPr lang="en-US" sz="1150" dirty="0"/>
           </a:p>
         </p:txBody>
       </p:sp>
@@ -4419,7 +4428,7 @@
         </p:nvSpPr>
         <p:spPr>
           <a:xfrm>
-            <a:off x="731520" y="457200"/>
+            <a:off x="731520" y="411480"/>
             <a:ext cx="2011680" cy="292608"/>
           </a:xfrm>
           <a:prstGeom prst="roundRect">
@@ -4446,7 +4455,7 @@
         </p:nvSpPr>
         <p:spPr>
           <a:xfrm>
-            <a:off x="731520" y="457200"/>
+            <a:off x="731520" y="411480"/>
             <a:ext cx="2011680" cy="292608"/>
           </a:xfrm>
           <a:prstGeom prst="rect">
@@ -4485,24 +4494,24 @@
         </p:nvSpPr>
         <p:spPr>
           <a:xfrm>
-            <a:off x="731520" y="822960"/>
-            <a:ext cx="10515600" cy="640080"/>
-          </a:xfrm>
-          <a:prstGeom prst="rect">
-            <a:avLst/>
-          </a:prstGeom>
-          <a:noFill/>
-          <a:ln/>
-        </p:spPr>
-        <p:txBody>
-          <a:bodyPr wrap="square" rtlCol="0" anchor="ctr"/>
-          <a:lstStyle/>
-          <a:p>
-            <a:pPr indent="0" marL="0">
-              <a:buNone/>
-            </a:pPr>
-            <a:r>
-              <a:rPr lang="en-US" sz="2400" b="1" dirty="0">
+            <a:off x="731520" y="777240"/>
+            <a:ext cx="10698480" cy="594360"/>
+          </a:xfrm>
+          <a:prstGeom prst="rect">
+            <a:avLst/>
+          </a:prstGeom>
+          <a:noFill/>
+          <a:ln/>
+        </p:spPr>
+        <p:txBody>
+          <a:bodyPr wrap="square" rtlCol="0" anchor="ctr"/>
+          <a:lstStyle/>
+          <a:p>
+            <a:pPr indent="0" marL="0">
+              <a:buNone/>
+            </a:pPr>
+            <a:r>
+              <a:rPr lang="en-US" sz="2200" b="1" dirty="0">
                 <a:solidFill>
                   <a:srgbClr val="E8F4EE"/>
                 </a:solidFill>
@@ -4510,9 +4519,9 @@
                 <a:ea typeface="Arial" pitchFamily="34" charset="-122"/>
                 <a:cs typeface="Arial" pitchFamily="34" charset="-120"/>
               </a:rPr>
-              <a:t>Production Architecture &amp; 337 Passing Automated Tests</a:t>
-            </a:r>
-            <a:endParaRPr lang="en-US" sz="2400" dirty="0"/>
+              <a:t>Production Architecture &amp; 335 Passing Automated Tests</a:t>
+            </a:r>
+            <a:endParaRPr lang="en-US" sz="2200" dirty="0"/>
           </a:p>
         </p:txBody>
       </p:sp>
@@ -4524,12 +4533,12 @@
         </p:nvSpPr>
         <p:spPr>
           <a:xfrm>
-            <a:off x="731520" y="1737360"/>
-            <a:ext cx="3429000" cy="4389120"/>
+            <a:off x="731520" y="1600200"/>
+            <a:ext cx="3337560" cy="4389120"/>
           </a:xfrm>
           <a:prstGeom prst="roundRect">
             <a:avLst>
-              <a:gd name="adj" fmla="val 4000"/>
+              <a:gd name="adj" fmla="val 4110"/>
             </a:avLst>
           </a:prstGeom>
           <a:solidFill>
@@ -4551,7 +4560,7 @@
         </p:nvSpPr>
         <p:spPr>
           <a:xfrm>
-            <a:off x="1097280" y="2103120"/>
+            <a:off x="1051560" y="1920240"/>
             <a:ext cx="2697480" cy="365760"/>
           </a:xfrm>
           <a:prstGeom prst="rect">
@@ -4576,7 +4585,7 @@
                 <a:ea typeface="Arial" pitchFamily="34" charset="-122"/>
                 <a:cs typeface="Arial" pitchFamily="34" charset="-120"/>
               </a:rPr>
-              <a:t>337 Passing Tests</a:t>
+              <a:t>335 Passing Tests</a:t>
             </a:r>
             <a:endParaRPr lang="en-US" sz="1600" dirty="0"/>
           </a:p>
@@ -4590,7 +4599,7 @@
         </p:nvSpPr>
         <p:spPr>
           <a:xfrm>
-            <a:off x="1097280" y="2651760"/>
+            <a:off x="1051560" y="2468880"/>
             <a:ext cx="2697480" cy="548640"/>
           </a:xfrm>
           <a:prstGeom prst="rect">
@@ -4607,7 +4616,7 @@
               <a:buNone/>
             </a:pPr>
             <a:r>
-              <a:rPr lang="en-US" sz="3200" b="1" dirty="0">
+              <a:rPr lang="en-US" sz="3000" b="1" dirty="0">
                 <a:solidFill>
                   <a:srgbClr val="3ECF8E"/>
                 </a:solidFill>
@@ -4617,7 +4626,7 @@
               </a:rPr>
               <a:t>100%</a:t>
             </a:r>
-            <a:endParaRPr lang="en-US" sz="3200" dirty="0"/>
+            <a:endParaRPr lang="en-US" sz="3000" dirty="0"/>
           </a:p>
         </p:txBody>
       </p:sp>
@@ -4629,7 +4638,7 @@
         </p:nvSpPr>
         <p:spPr>
           <a:xfrm>
-            <a:off x="1097280" y="3246120"/>
+            <a:off x="1051560" y="3063240"/>
             <a:ext cx="2697480" cy="274320"/>
           </a:xfrm>
           <a:prstGeom prst="rect">
@@ -4668,8 +4677,8 @@
         </p:nvSpPr>
         <p:spPr>
           <a:xfrm>
-            <a:off x="1097280" y="3749040"/>
-            <a:ext cx="2697480" cy="2103120"/>
+            <a:off x="1051560" y="3520440"/>
+            <a:ext cx="2697480" cy="2194560"/>
           </a:xfrm>
           <a:prstGeom prst="rect">
             <a:avLst/>
@@ -4683,12 +4692,12 @@
           <a:p>
             <a:pPr indent="0" marL="0">
               <a:lnSpc>
-                <a:spcPts val="1700"/>
+                <a:spcPts val="1600"/>
               </a:lnSpc>
               <a:buNone/>
             </a:pPr>
             <a:r>
-              <a:rPr lang="en-US" sz="1200" dirty="0">
+              <a:rPr lang="en-US" sz="1150" dirty="0">
                 <a:solidFill>
                   <a:srgbClr val="9AB4A5"/>
                 </a:solidFill>
@@ -4698,7 +4707,7 @@
               </a:rPr>
               <a:t>Exhaustive automated tests verifying chess rules, move legalities, edge-case pawn promotions, and Blitz clock flag-falls.</a:t>
             </a:r>
-            <a:endParaRPr lang="en-US" sz="1200" dirty="0"/>
+            <a:endParaRPr lang="en-US" sz="1150" dirty="0"/>
           </a:p>
         </p:txBody>
       </p:sp>
@@ -4710,12 +4719,12 @@
         </p:nvSpPr>
         <p:spPr>
           <a:xfrm>
-            <a:off x="4343400" y="1737360"/>
-            <a:ext cx="3429000" cy="4389120"/>
+            <a:off x="4416552" y="1600200"/>
+            <a:ext cx="3337560" cy="4389120"/>
           </a:xfrm>
           <a:prstGeom prst="roundRect">
             <a:avLst>
-              <a:gd name="adj" fmla="val 4000"/>
+              <a:gd name="adj" fmla="val 4110"/>
             </a:avLst>
           </a:prstGeom>
           <a:solidFill>
@@ -4737,7 +4746,7 @@
         </p:nvSpPr>
         <p:spPr>
           <a:xfrm>
-            <a:off x="4709160" y="2103120"/>
+            <a:off x="4736592" y="1920240"/>
             <a:ext cx="2697480" cy="365760"/>
           </a:xfrm>
           <a:prstGeom prst="rect">
@@ -4776,7 +4785,7 @@
         </p:nvSpPr>
         <p:spPr>
           <a:xfrm>
-            <a:off x="4709160" y="2651760"/>
+            <a:off x="4736592" y="2468880"/>
             <a:ext cx="2697480" cy="548640"/>
           </a:xfrm>
           <a:prstGeom prst="rect">
@@ -4793,7 +4802,7 @@
               <a:buNone/>
             </a:pPr>
             <a:r>
-              <a:rPr lang="en-US" sz="3200" b="1" dirty="0">
+              <a:rPr lang="en-US" sz="3000" b="1" dirty="0">
                 <a:solidFill>
                   <a:srgbClr val="3ECF8E"/>
                 </a:solidFill>
@@ -4803,7 +4812,7 @@
               </a:rPr>
               <a:t>Zero</a:t>
             </a:r>
-            <a:endParaRPr lang="en-US" sz="3200" dirty="0"/>
+            <a:endParaRPr lang="en-US" sz="3000" dirty="0"/>
           </a:p>
         </p:txBody>
       </p:sp>
@@ -4815,7 +4824,7 @@
         </p:nvSpPr>
         <p:spPr>
           <a:xfrm>
-            <a:off x="4709160" y="3246120"/>
+            <a:off x="4736592" y="3063240"/>
             <a:ext cx="2697480" cy="274320"/>
           </a:xfrm>
           <a:prstGeom prst="rect">
@@ -4854,8 +4863,8 @@
         </p:nvSpPr>
         <p:spPr>
           <a:xfrm>
-            <a:off x="4709160" y="3749040"/>
-            <a:ext cx="2697480" cy="2103120"/>
+            <a:off x="4736592" y="3520440"/>
+            <a:ext cx="2697480" cy="2194560"/>
           </a:xfrm>
           <a:prstGeom prst="rect">
             <a:avLst/>
@@ -4869,12 +4878,12 @@
           <a:p>
             <a:pPr indent="0" marL="0">
               <a:lnSpc>
-                <a:spcPts val="1700"/>
+                <a:spcPts val="1600"/>
               </a:lnSpc>
               <a:buNone/>
             </a:pPr>
             <a:r>
-              <a:rPr lang="en-US" sz="1200" dirty="0">
+              <a:rPr lang="en-US" sz="1150" dirty="0">
                 <a:solidFill>
                   <a:srgbClr val="9AB4A5"/>
                 </a:solidFill>
@@ -4884,7 +4893,7 @@
               </a:rPr>
               <a:t>Custom headless MockSpeechSynthesis and AudioContext harnesses test voice queuing, VAD interruptions, and race conditions in Node CI.</a:t>
             </a:r>
-            <a:endParaRPr lang="en-US" sz="1200" dirty="0"/>
+            <a:endParaRPr lang="en-US" sz="1150" dirty="0"/>
           </a:p>
         </p:txBody>
       </p:sp>
@@ -4896,12 +4905,12 @@
         </p:nvSpPr>
         <p:spPr>
           <a:xfrm>
-            <a:off x="7955280" y="1737360"/>
-            <a:ext cx="3429000" cy="4389120"/>
+            <a:off x="8101584" y="1600200"/>
+            <a:ext cx="3337560" cy="4389120"/>
           </a:xfrm>
           <a:prstGeom prst="roundRect">
             <a:avLst>
-              <a:gd name="adj" fmla="val 4000"/>
+              <a:gd name="adj" fmla="val 4110"/>
             </a:avLst>
           </a:prstGeom>
           <a:solidFill>
@@ -4923,7 +4932,7 @@
         </p:nvSpPr>
         <p:spPr>
           <a:xfrm>
-            <a:off x="8321040" y="2103120"/>
+            <a:off x="8421624" y="1920240"/>
             <a:ext cx="2697480" cy="365760"/>
           </a:xfrm>
           <a:prstGeom prst="rect">
@@ -4962,7 +4971,7 @@
         </p:nvSpPr>
         <p:spPr>
           <a:xfrm>
-            <a:off x="8321040" y="2651760"/>
+            <a:off x="8421624" y="2468880"/>
             <a:ext cx="2697480" cy="548640"/>
           </a:xfrm>
           <a:prstGeom prst="rect">
@@ -4979,7 +4988,7 @@
               <a:buNone/>
             </a:pPr>
             <a:r>
-              <a:rPr lang="en-US" sz="3200" b="1" dirty="0">
+              <a:rPr lang="en-US" sz="3000" b="1" dirty="0">
                 <a:solidFill>
                   <a:srgbClr val="3ECF8E"/>
                 </a:solidFill>
@@ -4989,7 +4998,7 @@
               </a:rPr>
               <a:t>30s</a:t>
             </a:r>
-            <a:endParaRPr lang="en-US" sz="3200" dirty="0"/>
+            <a:endParaRPr lang="en-US" sz="3000" dirty="0"/>
           </a:p>
         </p:txBody>
       </p:sp>
@@ -5001,7 +5010,7 @@
         </p:nvSpPr>
         <p:spPr>
           <a:xfrm>
-            <a:off x="8321040" y="3246120"/>
+            <a:off x="8421624" y="3063240"/>
             <a:ext cx="2697480" cy="274320"/>
           </a:xfrm>
           <a:prstGeom prst="rect">
@@ -5040,8 +5049,8 @@
         </p:nvSpPr>
         <p:spPr>
           <a:xfrm>
-            <a:off x="8321040" y="3749040"/>
-            <a:ext cx="2697480" cy="2103120"/>
+            <a:off x="8421624" y="3520440"/>
+            <a:ext cx="2697480" cy="2194560"/>
           </a:xfrm>
           <a:prstGeom prst="rect">
             <a:avLst/>
@@ -5055,12 +5064,12 @@
           <a:p>
             <a:pPr indent="0" marL="0">
               <a:lnSpc>
-                <a:spcPts val="1700"/>
+                <a:spcPts val="1600"/>
               </a:lnSpc>
               <a:buNone/>
             </a:pPr>
             <a:r>
-              <a:rPr lang="en-US" sz="1200" dirty="0">
+              <a:rPr lang="en-US" sz="1150" dirty="0">
                 <a:solidFill>
                   <a:srgbClr val="9AB4A5"/>
                 </a:solidFill>
@@ -5070,7 +5079,7 @@
               </a:rPr>
               <a:t>Watchdogs prevent UI lockups: connecting (7s), thinking (10s), speaking (30s) automatically recover to idle if sockets disconnect.</a:t>
             </a:r>
-            <a:endParaRPr lang="en-US" sz="1200" dirty="0"/>
+            <a:endParaRPr lang="en-US" sz="1150" dirty="0"/>
           </a:p>
         </p:txBody>
       </p:sp>
@@ -5114,7 +5123,7 @@
         </p:nvSpPr>
         <p:spPr>
           <a:xfrm>
-            <a:off x="731520" y="457200"/>
+            <a:off x="731520" y="411480"/>
             <a:ext cx="2011680" cy="292608"/>
           </a:xfrm>
           <a:prstGeom prst="roundRect">
@@ -5141,7 +5150,7 @@
         </p:nvSpPr>
         <p:spPr>
           <a:xfrm>
-            <a:off x="731520" y="457200"/>
+            <a:off x="731520" y="411480"/>
             <a:ext cx="2011680" cy="292608"/>
           </a:xfrm>
           <a:prstGeom prst="rect">
@@ -5180,24 +5189,24 @@
         </p:nvSpPr>
         <p:spPr>
           <a:xfrm>
-            <a:off x="731520" y="822960"/>
-            <a:ext cx="10515600" cy="640080"/>
-          </a:xfrm>
-          <a:prstGeom prst="rect">
-            <a:avLst/>
-          </a:prstGeom>
-          <a:noFill/>
-          <a:ln/>
-        </p:spPr>
-        <p:txBody>
-          <a:bodyPr wrap="square" rtlCol="0" anchor="ctr"/>
-          <a:lstStyle/>
-          <a:p>
-            <a:pPr indent="0" marL="0">
-              <a:buNone/>
-            </a:pPr>
-            <a:r>
-              <a:rPr lang="en-US" sz="2400" b="1" dirty="0">
+            <a:off x="731520" y="777240"/>
+            <a:ext cx="10698480" cy="594360"/>
+          </a:xfrm>
+          <a:prstGeom prst="rect">
+            <a:avLst/>
+          </a:prstGeom>
+          <a:noFill/>
+          <a:ln/>
+        </p:spPr>
+        <p:txBody>
+          <a:bodyPr wrap="square" rtlCol="0" anchor="ctr"/>
+          <a:lstStyle/>
+          <a:p>
+            <a:pPr indent="0" marL="0">
+              <a:buNone/>
+            </a:pPr>
+            <a:r>
+              <a:rPr lang="en-US" sz="2200" b="1" dirty="0">
                 <a:solidFill>
                   <a:srgbClr val="E8F4EE"/>
                 </a:solidFill>
@@ -5207,7 +5216,7 @@
               </a:rPr>
               <a:t>High Social Impact Meets a Scalable Commercial Opportunity</a:t>
             </a:r>
-            <a:endParaRPr lang="en-US" sz="2400" dirty="0"/>
+            <a:endParaRPr lang="en-US" sz="2200" dirty="0"/>
           </a:p>
         </p:txBody>
       </p:sp>
@@ -5219,8 +5228,8 @@
         </p:nvSpPr>
         <p:spPr>
           <a:xfrm>
-            <a:off x="731520" y="1737360"/>
-            <a:ext cx="5212080" cy="4389120"/>
+            <a:off x="731520" y="1600200"/>
+            <a:ext cx="5166360" cy="4389120"/>
           </a:xfrm>
           <a:prstGeom prst="roundRect">
             <a:avLst>
@@ -5260,8 +5269,8 @@
         </p:blipFill>
         <p:spPr>
           <a:xfrm>
-            <a:off x="1097280" y="2103120"/>
-            <a:ext cx="457200" cy="457200"/>
+            <a:off x="1051560" y="1920240"/>
+            <a:ext cx="411480" cy="411480"/>
           </a:xfrm>
           <a:prstGeom prst="rect">
             <a:avLst/>
@@ -5276,24 +5285,24 @@
         </p:nvSpPr>
         <p:spPr>
           <a:xfrm>
-            <a:off x="1645920" y="2148840"/>
-            <a:ext cx="3840480" cy="365760"/>
-          </a:xfrm>
-          <a:prstGeom prst="rect">
-            <a:avLst/>
-          </a:prstGeom>
-          <a:noFill/>
-          <a:ln/>
-        </p:spPr>
-        <p:txBody>
-          <a:bodyPr wrap="square" rtlCol="0" anchor="ctr"/>
-          <a:lstStyle/>
-          <a:p>
-            <a:pPr indent="0" marL="0">
-              <a:buNone/>
-            </a:pPr>
-            <a:r>
-              <a:rPr lang="en-US" sz="1700" b="1" dirty="0">
+            <a:off x="1600200" y="1965960"/>
+            <a:ext cx="4160520" cy="365760"/>
+          </a:xfrm>
+          <a:prstGeom prst="rect">
+            <a:avLst/>
+          </a:prstGeom>
+          <a:noFill/>
+          <a:ln/>
+        </p:spPr>
+        <p:txBody>
+          <a:bodyPr wrap="square" rtlCol="0" anchor="ctr"/>
+          <a:lstStyle/>
+          <a:p>
+            <a:pPr indent="0" marL="0">
+              <a:buNone/>
+            </a:pPr>
+            <a:r>
+              <a:rPr lang="en-US" sz="1650" b="1" dirty="0">
                 <a:solidFill>
                   <a:srgbClr val="FFFFFF"/>
                 </a:solidFill>
@@ -5303,7 +5312,7 @@
               </a:rPr>
               <a:t>Market Scale &amp; Demographics</a:t>
             </a:r>
-            <a:endParaRPr lang="en-US" sz="1700" dirty="0"/>
+            <a:endParaRPr lang="en-US" sz="1650" dirty="0"/>
           </a:p>
         </p:txBody>
       </p:sp>
@@ -5315,8 +5324,8 @@
         </p:nvSpPr>
         <p:spPr>
           <a:xfrm>
-            <a:off x="1097280" y="2743200"/>
-            <a:ext cx="4480560" cy="3108960"/>
+            <a:off x="1051560" y="2560320"/>
+            <a:ext cx="4526280" cy="3108960"/>
           </a:xfrm>
           <a:prstGeom prst="rect">
             <a:avLst/>
@@ -5330,7 +5339,7 @@
           <a:p>
             <a:pPr indent="0" marL="0">
               <a:lnSpc>
-                <a:spcPts val="1800"/>
+                <a:spcPts val="1700"/>
               </a:lnSpc>
               <a:buNone/>
             </a:pPr>
@@ -5350,7 +5359,7 @@
           <a:p>
             <a:pPr indent="0" marL="0">
               <a:lnSpc>
-                <a:spcPts val="1800"/>
+                <a:spcPts val="1700"/>
               </a:lnSpc>
               <a:buNone/>
             </a:pPr>
@@ -5370,7 +5379,7 @@
           <a:p>
             <a:pPr indent="0" marL="0">
               <a:lnSpc>
-                <a:spcPts val="1800"/>
+                <a:spcPts val="1700"/>
               </a:lnSpc>
               <a:buNone/>
             </a:pPr>
@@ -5379,7 +5388,7 @@
           <a:p>
             <a:pPr indent="0" marL="0">
               <a:lnSpc>
-                <a:spcPts val="1800"/>
+                <a:spcPts val="1700"/>
               </a:lnSpc>
               <a:buNone/>
             </a:pPr>
@@ -5399,7 +5408,7 @@
           <a:p>
             <a:pPr indent="0" marL="0">
               <a:lnSpc>
-                <a:spcPts val="1800"/>
+                <a:spcPts val="1700"/>
               </a:lnSpc>
               <a:buNone/>
             </a:pPr>
@@ -5419,7 +5428,7 @@
           <a:p>
             <a:pPr indent="0" marL="0">
               <a:lnSpc>
-                <a:spcPts val="1800"/>
+                <a:spcPts val="1700"/>
               </a:lnSpc>
               <a:buNone/>
             </a:pPr>
@@ -5428,7 +5437,7 @@
           <a:p>
             <a:pPr indent="0" marL="0">
               <a:lnSpc>
-                <a:spcPts val="1800"/>
+                <a:spcPts val="1700"/>
               </a:lnSpc>
               <a:buNone/>
             </a:pPr>
@@ -5448,7 +5457,7 @@
           <a:p>
             <a:pPr indent="0" marL="0">
               <a:lnSpc>
-                <a:spcPts val="1800"/>
+                <a:spcPts val="1700"/>
               </a:lnSpc>
               <a:buNone/>
             </a:pPr>
@@ -5475,8 +5484,8 @@
         </p:nvSpPr>
         <p:spPr>
           <a:xfrm>
-            <a:off x="6217920" y="1737360"/>
-            <a:ext cx="5212080" cy="4389120"/>
+            <a:off x="6263640" y="1600200"/>
+            <a:ext cx="5166360" cy="4389120"/>
           </a:xfrm>
           <a:prstGeom prst="roundRect">
             <a:avLst>
@@ -5516,8 +5525,8 @@
         </p:blipFill>
         <p:spPr>
           <a:xfrm>
-            <a:off x="6583680" y="2103120"/>
-            <a:ext cx="457200" cy="457200"/>
+            <a:off x="6583680" y="1920240"/>
+            <a:ext cx="411480" cy="411480"/>
           </a:xfrm>
           <a:prstGeom prst="rect">
             <a:avLst/>
@@ -5532,24 +5541,24 @@
         </p:nvSpPr>
         <p:spPr>
           <a:xfrm>
-            <a:off x="7132320" y="2148840"/>
-            <a:ext cx="3931920" cy="365760"/>
-          </a:xfrm>
-          <a:prstGeom prst="rect">
-            <a:avLst/>
-          </a:prstGeom>
-          <a:noFill/>
-          <a:ln/>
-        </p:spPr>
-        <p:txBody>
-          <a:bodyPr wrap="square" rtlCol="0" anchor="ctr"/>
-          <a:lstStyle/>
-          <a:p>
-            <a:pPr indent="0" marL="0">
-              <a:buNone/>
-            </a:pPr>
-            <a:r>
-              <a:rPr lang="en-US" sz="1700" b="1" dirty="0">
+            <a:off x="7132320" y="1965960"/>
+            <a:ext cx="4160520" cy="365760"/>
+          </a:xfrm>
+          <a:prstGeom prst="rect">
+            <a:avLst/>
+          </a:prstGeom>
+          <a:noFill/>
+          <a:ln/>
+        </p:spPr>
+        <p:txBody>
+          <a:bodyPr wrap="square" rtlCol="0" anchor="ctr"/>
+          <a:lstStyle/>
+          <a:p>
+            <a:pPr indent="0" marL="0">
+              <a:buNone/>
+            </a:pPr>
+            <a:r>
+              <a:rPr lang="en-US" sz="1650" b="1" dirty="0">
                 <a:solidFill>
                   <a:srgbClr val="FFFFFF"/>
                 </a:solidFill>
@@ -5559,7 +5568,7 @@
               </a:rPr>
               <a:t>Business Model &amp; Distribution</a:t>
             </a:r>
-            <a:endParaRPr lang="en-US" sz="1700" dirty="0"/>
+            <a:endParaRPr lang="en-US" sz="1650" dirty="0"/>
           </a:p>
         </p:txBody>
       </p:sp>
@@ -5571,8 +5580,8 @@
         </p:nvSpPr>
         <p:spPr>
           <a:xfrm>
-            <a:off x="6583680" y="2743200"/>
-            <a:ext cx="4480560" cy="3108960"/>
+            <a:off x="6583680" y="2560320"/>
+            <a:ext cx="4526280" cy="3108960"/>
           </a:xfrm>
           <a:prstGeom prst="rect">
             <a:avLst/>
@@ -5586,7 +5595,7 @@
           <a:p>
             <a:pPr indent="0" marL="0">
               <a:lnSpc>
-                <a:spcPts val="1800"/>
+                <a:spcPts val="1700"/>
               </a:lnSpc>
               <a:buNone/>
             </a:pPr>
@@ -5606,7 +5615,7 @@
           <a:p>
             <a:pPr indent="0" marL="0">
               <a:lnSpc>
-                <a:spcPts val="1800"/>
+                <a:spcPts val="1700"/>
               </a:lnSpc>
               <a:buNone/>
             </a:pPr>
@@ -5626,7 +5635,7 @@
           <a:p>
             <a:pPr indent="0" marL="0">
               <a:lnSpc>
-                <a:spcPts val="1800"/>
+                <a:spcPts val="1700"/>
               </a:lnSpc>
               <a:buNone/>
             </a:pPr>
@@ -5635,7 +5644,7 @@
           <a:p>
             <a:pPr indent="0" marL="0">
               <a:lnSpc>
-                <a:spcPts val="1800"/>
+                <a:spcPts val="1700"/>
               </a:lnSpc>
               <a:buNone/>
             </a:pPr>
@@ -5655,7 +5664,7 @@
           <a:p>
             <a:pPr indent="0" marL="0">
               <a:lnSpc>
-                <a:spcPts val="1800"/>
+                <a:spcPts val="1700"/>
               </a:lnSpc>
               <a:buNone/>
             </a:pPr>
@@ -5675,7 +5684,7 @@
           <a:p>
             <a:pPr indent="0" marL="0">
               <a:lnSpc>
-                <a:spcPts val="1800"/>
+                <a:spcPts val="1700"/>
               </a:lnSpc>
               <a:buNone/>
             </a:pPr>
@@ -5684,7 +5693,7 @@
           <a:p>
             <a:pPr indent="0" marL="0">
               <a:lnSpc>
-                <a:spcPts val="1800"/>
+                <a:spcPts val="1700"/>
               </a:lnSpc>
               <a:buNone/>
             </a:pPr>
@@ -5704,7 +5713,7 @@
           <a:p>
             <a:pPr indent="0" marL="0">
               <a:lnSpc>
-                <a:spcPts val="1800"/>
+                <a:spcPts val="1700"/>
               </a:lnSpc>
               <a:buNone/>
             </a:pPr>
@@ -5763,7 +5772,7 @@
         </p:nvSpPr>
         <p:spPr>
           <a:xfrm>
-            <a:off x="731520" y="457200"/>
+            <a:off x="731520" y="411480"/>
             <a:ext cx="2011680" cy="292608"/>
           </a:xfrm>
           <a:prstGeom prst="roundRect">
@@ -5790,7 +5799,7 @@
         </p:nvSpPr>
         <p:spPr>
           <a:xfrm>
-            <a:off x="731520" y="457200"/>
+            <a:off x="731520" y="411480"/>
             <a:ext cx="2011680" cy="292608"/>
           </a:xfrm>
           <a:prstGeom prst="rect">
@@ -5829,24 +5838,24 @@
         </p:nvSpPr>
         <p:spPr>
           <a:xfrm>
-            <a:off x="731520" y="822960"/>
-            <a:ext cx="10515600" cy="640080"/>
-          </a:xfrm>
-          <a:prstGeom prst="rect">
-            <a:avLst/>
-          </a:prstGeom>
-          <a:noFill/>
-          <a:ln/>
-        </p:spPr>
-        <p:txBody>
-          <a:bodyPr wrap="square" rtlCol="0" anchor="ctr"/>
-          <a:lstStyle/>
-          <a:p>
-            <a:pPr indent="0" marL="0">
-              <a:buNone/>
-            </a:pPr>
-            <a:r>
-              <a:rPr lang="en-US" sz="2400" b="1" dirty="0">
+            <a:off x="731520" y="777240"/>
+            <a:ext cx="10698480" cy="594360"/>
+          </a:xfrm>
+          <a:prstGeom prst="rect">
+            <a:avLst/>
+          </a:prstGeom>
+          <a:noFill/>
+          <a:ln/>
+        </p:spPr>
+        <p:txBody>
+          <a:bodyPr wrap="square" rtlCol="0" anchor="ctr"/>
+          <a:lstStyle/>
+          <a:p>
+            <a:pPr indent="0" marL="0">
+              <a:buNone/>
+            </a:pPr>
+            <a:r>
+              <a:rPr lang="en-US" sz="2200" b="1" dirty="0">
                 <a:solidFill>
                   <a:srgbClr val="E8F4EE"/>
                 </a:solidFill>
@@ -5856,7 +5865,7 @@
               </a:rPr>
               <a:t>The Future: Hardware Integration &amp; Global Peer-to-Peer Voice Rooms</a:t>
             </a:r>
-            <a:endParaRPr lang="en-US" sz="2400" dirty="0"/>
+            <a:endParaRPr lang="en-US" sz="2200" dirty="0"/>
           </a:p>
         </p:txBody>
       </p:sp>
@@ -5868,7 +5877,7 @@
         </p:nvSpPr>
         <p:spPr>
           <a:xfrm>
-            <a:off x="731520" y="1737360"/>
+            <a:off x="731520" y="1600200"/>
             <a:ext cx="5166360" cy="2057400"/>
           </a:xfrm>
           <a:prstGeom prst="roundRect">
@@ -5909,7 +5918,7 @@
         </p:blipFill>
         <p:spPr>
           <a:xfrm>
-            <a:off x="1051560" y="2057400"/>
+            <a:off x="1051560" y="1874520"/>
             <a:ext cx="411480" cy="411480"/>
           </a:xfrm>
           <a:prstGeom prst="rect">
@@ -5925,24 +5934,24 @@
         </p:nvSpPr>
         <p:spPr>
           <a:xfrm>
-            <a:off x="1600200" y="2011680"/>
-            <a:ext cx="4023360" cy="365760"/>
-          </a:xfrm>
-          <a:prstGeom prst="rect">
-            <a:avLst/>
-          </a:prstGeom>
-          <a:noFill/>
-          <a:ln/>
-        </p:spPr>
-        <p:txBody>
-          <a:bodyPr wrap="square" rtlCol="0" anchor="ctr"/>
-          <a:lstStyle/>
-          <a:p>
-            <a:pPr indent="0" marL="0">
-              <a:buNone/>
-            </a:pPr>
-            <a:r>
-              <a:rPr lang="en-US" sz="1500" b="1" dirty="0">
+            <a:off x="1600200" y="1828800"/>
+            <a:ext cx="4160520" cy="320040"/>
+          </a:xfrm>
+          <a:prstGeom prst="rect">
+            <a:avLst/>
+          </a:prstGeom>
+          <a:noFill/>
+          <a:ln/>
+        </p:spPr>
+        <p:txBody>
+          <a:bodyPr wrap="square" rtlCol="0" anchor="ctr"/>
+          <a:lstStyle/>
+          <a:p>
+            <a:pPr indent="0" marL="0">
+              <a:buNone/>
+            </a:pPr>
+            <a:r>
+              <a:rPr lang="en-US" sz="1450" b="1" dirty="0">
                 <a:solidFill>
                   <a:srgbClr val="FFFFFF"/>
                 </a:solidFill>
@@ -5952,7 +5961,7 @@
               </a:rPr>
               <a:t>Voice-to-Voice Multiplayer</a:t>
             </a:r>
-            <a:endParaRPr lang="en-US" sz="1500" dirty="0"/>
+            <a:endParaRPr lang="en-US" sz="1450" dirty="0"/>
           </a:p>
         </p:txBody>
       </p:sp>
@@ -5964,8 +5973,8 @@
         </p:nvSpPr>
         <p:spPr>
           <a:xfrm>
-            <a:off x="1051560" y="2560320"/>
-            <a:ext cx="4526280" cy="1051560"/>
+            <a:off x="1051560" y="2377440"/>
+            <a:ext cx="4526280" cy="1143000"/>
           </a:xfrm>
           <a:prstGeom prst="rect">
             <a:avLst/>
@@ -5979,12 +5988,12 @@
           <a:p>
             <a:pPr indent="0" marL="0">
               <a:lnSpc>
-                <a:spcPts val="1700"/>
+                <a:spcPts val="1600"/>
               </a:lnSpc>
               <a:buNone/>
             </a:pPr>
             <a:r>
-              <a:rPr lang="en-US" sz="1200" dirty="0">
+              <a:rPr lang="en-US" sz="1150" dirty="0">
                 <a:solidFill>
                   <a:srgbClr val="9AB4A5"/>
                 </a:solidFill>
@@ -5994,7 +6003,7 @@
               </a:rPr>
               <a:t>Two blind players connecting over real-time WebRTC audio channels, making moves verbally with automatic arbiter adjudication.</a:t>
             </a:r>
-            <a:endParaRPr lang="en-US" sz="1200" dirty="0"/>
+            <a:endParaRPr lang="en-US" sz="1150" dirty="0"/>
           </a:p>
         </p:txBody>
       </p:sp>
@@ -6006,7 +6015,7 @@
         </p:nvSpPr>
         <p:spPr>
           <a:xfrm>
-            <a:off x="6126480" y="1737360"/>
+            <a:off x="6263640" y="1600200"/>
             <a:ext cx="5166360" cy="2057400"/>
           </a:xfrm>
           <a:prstGeom prst="roundRect">
@@ -6047,7 +6056,7 @@
         </p:blipFill>
         <p:spPr>
           <a:xfrm>
-            <a:off x="6446520" y="2057400"/>
+            <a:off x="6583680" y="1874520"/>
             <a:ext cx="411480" cy="411480"/>
           </a:xfrm>
           <a:prstGeom prst="rect">
@@ -6063,24 +6072,24 @@
         </p:nvSpPr>
         <p:spPr>
           <a:xfrm>
-            <a:off x="6995160" y="2011680"/>
-            <a:ext cx="4023360" cy="365760"/>
-          </a:xfrm>
-          <a:prstGeom prst="rect">
-            <a:avLst/>
-          </a:prstGeom>
-          <a:noFill/>
-          <a:ln/>
-        </p:spPr>
-        <p:txBody>
-          <a:bodyPr wrap="square" rtlCol="0" anchor="ctr"/>
-          <a:lstStyle/>
-          <a:p>
-            <a:pPr indent="0" marL="0">
-              <a:buNone/>
-            </a:pPr>
-            <a:r>
-              <a:rPr lang="en-US" sz="1500" b="1" dirty="0">
+            <a:off x="7132320" y="1828800"/>
+            <a:ext cx="4160520" cy="320040"/>
+          </a:xfrm>
+          <a:prstGeom prst="rect">
+            <a:avLst/>
+          </a:prstGeom>
+          <a:noFill/>
+          <a:ln/>
+        </p:spPr>
+        <p:txBody>
+          <a:bodyPr wrap="square" rtlCol="0" anchor="ctr"/>
+          <a:lstStyle/>
+          <a:p>
+            <a:pPr indent="0" marL="0">
+              <a:buNone/>
+            </a:pPr>
+            <a:r>
+              <a:rPr lang="en-US" sz="1450" b="1" dirty="0">
                 <a:solidFill>
                   <a:srgbClr val="FFFFFF"/>
                 </a:solidFill>
@@ -6090,7 +6099,7 @@
               </a:rPr>
               <a:t>Haptic Physical Feedback</a:t>
             </a:r>
-            <a:endParaRPr lang="en-US" sz="1500" dirty="0"/>
+            <a:endParaRPr lang="en-US" sz="1450" dirty="0"/>
           </a:p>
         </p:txBody>
       </p:sp>
@@ -6102,8 +6111,8 @@
         </p:nvSpPr>
         <p:spPr>
           <a:xfrm>
-            <a:off x="6446520" y="2560320"/>
-            <a:ext cx="4526280" cy="1051560"/>
+            <a:off x="6583680" y="2377440"/>
+            <a:ext cx="4526280" cy="1143000"/>
           </a:xfrm>
           <a:prstGeom prst="rect">
             <a:avLst/>
@@ -6117,12 +6126,12 @@
           <a:p>
             <a:pPr indent="0" marL="0">
               <a:lnSpc>
-                <a:spcPts val="1700"/>
+                <a:spcPts val="1600"/>
               </a:lnSpc>
               <a:buNone/>
             </a:pPr>
             <a:r>
-              <a:rPr lang="en-US" sz="1200" dirty="0">
+              <a:rPr lang="en-US" sz="1150" dirty="0">
                 <a:solidFill>
                   <a:srgbClr val="9AB4A5"/>
                 </a:solidFill>
@@ -6132,7 +6141,7 @@
               </a:rPr>
               <a:t>Vibratory coordinate encoding on mobile devices providing tactile confirmation of piece captures, checks, and square moves.</a:t>
             </a:r>
-            <a:endParaRPr lang="en-US" sz="1200" dirty="0"/>
+            <a:endParaRPr lang="en-US" sz="1150" dirty="0"/>
           </a:p>
         </p:txBody>
       </p:sp>
@@ -6144,7 +6153,7 @@
         </p:nvSpPr>
         <p:spPr>
           <a:xfrm>
-            <a:off x="731520" y="3977640"/>
+            <a:off x="731520" y="3931920"/>
             <a:ext cx="5166360" cy="2057400"/>
           </a:xfrm>
           <a:prstGeom prst="roundRect">
@@ -6185,7 +6194,7 @@
         </p:blipFill>
         <p:spPr>
           <a:xfrm>
-            <a:off x="1051560" y="4297680"/>
+            <a:off x="1051560" y="4206240"/>
             <a:ext cx="411480" cy="411480"/>
           </a:xfrm>
           <a:prstGeom prst="rect">
@@ -6201,24 +6210,24 @@
         </p:nvSpPr>
         <p:spPr>
           <a:xfrm>
-            <a:off x="1600200" y="4251960"/>
-            <a:ext cx="4023360" cy="365760"/>
-          </a:xfrm>
-          <a:prstGeom prst="rect">
-            <a:avLst/>
-          </a:prstGeom>
-          <a:noFill/>
-          <a:ln/>
-        </p:spPr>
-        <p:txBody>
-          <a:bodyPr wrap="square" rtlCol="0" anchor="ctr"/>
-          <a:lstStyle/>
-          <a:p>
-            <a:pPr indent="0" marL="0">
-              <a:buNone/>
-            </a:pPr>
-            <a:r>
-              <a:rPr lang="en-US" sz="1500" b="1" dirty="0">
+            <a:off x="1600200" y="4160520"/>
+            <a:ext cx="4160520" cy="320040"/>
+          </a:xfrm>
+          <a:prstGeom prst="rect">
+            <a:avLst/>
+          </a:prstGeom>
+          <a:noFill/>
+          <a:ln/>
+        </p:spPr>
+        <p:txBody>
+          <a:bodyPr wrap="square" rtlCol="0" anchor="ctr"/>
+          <a:lstStyle/>
+          <a:p>
+            <a:pPr indent="0" marL="0">
+              <a:buNone/>
+            </a:pPr>
+            <a:r>
+              <a:rPr lang="en-US" sz="1450" b="1" dirty="0">
                 <a:solidFill>
                   <a:srgbClr val="FFFFFF"/>
                 </a:solidFill>
@@ -6228,7 +6237,7 @@
               </a:rPr>
               <a:t>Bluetooth DGT Board Sync</a:t>
             </a:r>
-            <a:endParaRPr lang="en-US" sz="1500" dirty="0"/>
+            <a:endParaRPr lang="en-US" sz="1450" dirty="0"/>
           </a:p>
         </p:txBody>
       </p:sp>
@@ -6240,8 +6249,8 @@
         </p:nvSpPr>
         <p:spPr>
           <a:xfrm>
-            <a:off x="1051560" y="4800600"/>
-            <a:ext cx="4526280" cy="1051560"/>
+            <a:off x="1051560" y="4709160"/>
+            <a:ext cx="4526280" cy="1143000"/>
           </a:xfrm>
           <a:prstGeom prst="rect">
             <a:avLst/>
@@ -6255,12 +6264,12 @@
           <a:p>
             <a:pPr indent="0" marL="0">
               <a:lnSpc>
-                <a:spcPts val="1700"/>
+                <a:spcPts val="1600"/>
               </a:lnSpc>
               <a:buNone/>
             </a:pPr>
             <a:r>
-              <a:rPr lang="en-US" sz="1200" dirty="0">
+              <a:rPr lang="en-US" sz="1150" dirty="0">
                 <a:solidFill>
                   <a:srgbClr val="9AB4A5"/>
                 </a:solidFill>
@@ -6270,7 +6279,7 @@
               </a:rPr>
               <a:t>Connect physical tactile boards (DGT, Millennium) via Web Bluetooth so pieces moved on physical wood reflect instantly in voice.</a:t>
             </a:r>
-            <a:endParaRPr lang="en-US" sz="1200" dirty="0"/>
+            <a:endParaRPr lang="en-US" sz="1150" dirty="0"/>
           </a:p>
         </p:txBody>
       </p:sp>
@@ -6282,7 +6291,7 @@
         </p:nvSpPr>
         <p:spPr>
           <a:xfrm>
-            <a:off x="6126480" y="3977640"/>
+            <a:off x="6263640" y="3931920"/>
             <a:ext cx="5166360" cy="2057400"/>
           </a:xfrm>
           <a:prstGeom prst="roundRect">
@@ -6323,7 +6332,7 @@
         </p:blipFill>
         <p:spPr>
           <a:xfrm>
-            <a:off x="6446520" y="4297680"/>
+            <a:off x="6583680" y="4206240"/>
             <a:ext cx="411480" cy="411480"/>
           </a:xfrm>
           <a:prstGeom prst="rect">
@@ -6339,24 +6348,24 @@
         </p:nvSpPr>
         <p:spPr>
           <a:xfrm>
-            <a:off x="6995160" y="4251960"/>
-            <a:ext cx="4023360" cy="365760"/>
-          </a:xfrm>
-          <a:prstGeom prst="rect">
-            <a:avLst/>
-          </a:prstGeom>
-          <a:noFill/>
-          <a:ln/>
-        </p:spPr>
-        <p:txBody>
-          <a:bodyPr wrap="square" rtlCol="0" anchor="ctr"/>
-          <a:lstStyle/>
-          <a:p>
-            <a:pPr indent="0" marL="0">
-              <a:buNone/>
-            </a:pPr>
-            <a:r>
-              <a:rPr lang="en-US" sz="1500" b="1" dirty="0">
+            <a:off x="7132320" y="4160520"/>
+            <a:ext cx="4160520" cy="320040"/>
+          </a:xfrm>
+          <a:prstGeom prst="rect">
+            <a:avLst/>
+          </a:prstGeom>
+          <a:noFill/>
+          <a:ln/>
+        </p:spPr>
+        <p:txBody>
+          <a:bodyPr wrap="square" rtlCol="0" anchor="ctr"/>
+          <a:lstStyle/>
+          <a:p>
+            <a:pPr indent="0" marL="0">
+              <a:buNone/>
+            </a:pPr>
+            <a:r>
+              <a:rPr lang="en-US" sz="1450" b="1" dirty="0">
                 <a:solidFill>
                   <a:srgbClr val="FFFFFF"/>
                 </a:solidFill>
@@ -6366,7 +6375,7 @@
               </a:rPr>
               <a:t>Multilingual Speech Models</a:t>
             </a:r>
-            <a:endParaRPr lang="en-US" sz="1500" dirty="0"/>
+            <a:endParaRPr lang="en-US" sz="1450" dirty="0"/>
           </a:p>
         </p:txBody>
       </p:sp>
@@ -6378,8 +6387,8 @@
         </p:nvSpPr>
         <p:spPr>
           <a:xfrm>
-            <a:off x="6446520" y="4800600"/>
-            <a:ext cx="4526280" cy="1051560"/>
+            <a:off x="6583680" y="4709160"/>
+            <a:ext cx="4526280" cy="1143000"/>
           </a:xfrm>
           <a:prstGeom prst="rect">
             <a:avLst/>
@@ -6393,12 +6402,12 @@
           <a:p>
             <a:pPr indent="0" marL="0">
               <a:lnSpc>
-                <a:spcPts val="1700"/>
+                <a:spcPts val="1600"/>
               </a:lnSpc>
               <a:buNone/>
             </a:pPr>
             <a:r>
-              <a:rPr lang="en-US" sz="1200" dirty="0">
+              <a:rPr lang="en-US" sz="1150" dirty="0">
                 <a:solidFill>
                   <a:srgbClr val="9AB4A5"/>
                 </a:solidFill>
@@ -6408,7 +6417,7 @@
               </a:rPr>
               <a:t>Expand IBCA phonetic models and voice coach personalities across Spanish, French, German, Hindi, and Arabic.</a:t>
             </a:r>
-            <a:endParaRPr lang="en-US" sz="1200" dirty="0"/>
+            <a:endParaRPr lang="en-US" sz="1150" dirty="0"/>
           </a:p>
         </p:txBody>
       </p:sp>

--- a/VoiceChessmate_Hackdevengers_2.0.pptx
+++ b/VoiceChessmate_Hackdevengers_2.0.pptx
@@ -1653,6 +1653,45 @@
         </p:nvSpPr>
         <p:spPr>
           <a:xfrm>
+            <a:off x="731520" y="4846320"/>
+            <a:ext cx="10698480" cy="365760"/>
+          </a:xfrm>
+          <a:prstGeom prst="rect">
+            <a:avLst/>
+          </a:prstGeom>
+          <a:noFill/>
+          <a:ln/>
+        </p:spPr>
+        <p:txBody>
+          <a:bodyPr wrap="square" rtlCol="0" anchor="ctr"/>
+          <a:lstStyle/>
+          <a:p>
+            <a:pPr algn="ctr" indent="0" marL="0">
+              <a:buNone/>
+            </a:pPr>
+            <a:r>
+              <a:rPr lang="en-US" sz="1350" b="1" dirty="0">
+                <a:solidFill>
+                  <a:srgbClr val="3ECF8E"/>
+                </a:solidFill>
+                <a:latin typeface="Arial" pitchFamily="34" charset="0"/>
+                <a:ea typeface="Arial" pitchFamily="34" charset="-122"/>
+                <a:cs typeface="Arial" pitchFamily="34" charset="-120"/>
+              </a:rPr>
+              <a:t>Live Production App: https://voicechessmate.vercel.app/</a:t>
+            </a:r>
+            <a:endParaRPr lang="en-US" sz="1350" dirty="0"/>
+          </a:p>
+        </p:txBody>
+      </p:sp>
+      <p:sp>
+        <p:nvSpPr>
+          <p:cNvPr id="7" name="Text 4"/>
+          <p:cNvSpPr/>
+          <p:nvPr/>
+        </p:nvSpPr>
+        <p:spPr>
+          <a:xfrm>
             <a:off x="731520" y="5577840"/>
             <a:ext cx="10698480" cy="365760"/>
           </a:xfrm>
